--- a/docs/doc.pptx
+++ b/docs/doc.pptx
@@ -5,7 +5,7 @@
     <p:sldMasterId id="2147483648" r:id="rId1"/>
   </p:sldMasterIdLst>
   <p:notesMasterIdLst>
-    <p:notesMasterId r:id="rId24"/>
+    <p:notesMasterId r:id="rId32"/>
   </p:notesMasterIdLst>
   <p:sldIdLst>
     <p:sldId id="256" r:id="rId2"/>
@@ -29,7 +29,15 @@
     <p:sldId id="274" r:id="rId20"/>
     <p:sldId id="275" r:id="rId21"/>
     <p:sldId id="276" r:id="rId22"/>
-    <p:sldId id="270" r:id="rId23"/>
+    <p:sldId id="278" r:id="rId23"/>
+    <p:sldId id="279" r:id="rId24"/>
+    <p:sldId id="280" r:id="rId25"/>
+    <p:sldId id="281" r:id="rId26"/>
+    <p:sldId id="282" r:id="rId27"/>
+    <p:sldId id="283" r:id="rId28"/>
+    <p:sldId id="284" r:id="rId29"/>
+    <p:sldId id="285" r:id="rId30"/>
+    <p:sldId id="286" r:id="rId31"/>
   </p:sldIdLst>
   <p:sldSz cx="12192000" cy="6858000"/>
   <p:notesSz cx="6858000" cy="9144000"/>
@@ -218,7 +226,7 @@
           <a:p>
             <a:fld id="{58277BCF-4664-F249-B601-020BB9DD71F4}" type="datetimeFigureOut">
               <a:rPr lang="en-US" smtClean="0"/>
-              <a:t>9/16/26</a:t>
+              <a:t>9/17/2026</a:t>
             </a:fld>
             <a:endParaRPr lang="en-US"/>
           </a:p>
@@ -925,7 +933,7 @@
           <a:p>
             <a:fld id="{C201A91A-3286-664F-B181-3F299156E507}" type="datetimeFigureOut">
               <a:rPr lang="en-US" smtClean="0"/>
-              <a:t>9/16/26</a:t>
+              <a:t>9/17/2026</a:t>
             </a:fld>
             <a:endParaRPr lang="en-US"/>
           </a:p>
@@ -1123,7 +1131,7 @@
           <a:p>
             <a:fld id="{C201A91A-3286-664F-B181-3F299156E507}" type="datetimeFigureOut">
               <a:rPr lang="en-US" smtClean="0"/>
-              <a:t>9/16/26</a:t>
+              <a:t>9/17/2026</a:t>
             </a:fld>
             <a:endParaRPr lang="en-US"/>
           </a:p>
@@ -1331,7 +1339,7 @@
           <a:p>
             <a:fld id="{C201A91A-3286-664F-B181-3F299156E507}" type="datetimeFigureOut">
               <a:rPr lang="en-US" smtClean="0"/>
-              <a:t>9/16/26</a:t>
+              <a:t>9/17/2026</a:t>
             </a:fld>
             <a:endParaRPr lang="en-US"/>
           </a:p>
@@ -1529,7 +1537,7 @@
           <a:p>
             <a:fld id="{C201A91A-3286-664F-B181-3F299156E507}" type="datetimeFigureOut">
               <a:rPr lang="en-US" smtClean="0"/>
-              <a:t>9/16/26</a:t>
+              <a:t>9/17/2026</a:t>
             </a:fld>
             <a:endParaRPr lang="en-US"/>
           </a:p>
@@ -1804,7 +1812,7 @@
           <a:p>
             <a:fld id="{C201A91A-3286-664F-B181-3F299156E507}" type="datetimeFigureOut">
               <a:rPr lang="en-US" smtClean="0"/>
-              <a:t>9/16/26</a:t>
+              <a:t>9/17/2026</a:t>
             </a:fld>
             <a:endParaRPr lang="en-US"/>
           </a:p>
@@ -2069,7 +2077,7 @@
           <a:p>
             <a:fld id="{C201A91A-3286-664F-B181-3F299156E507}" type="datetimeFigureOut">
               <a:rPr lang="en-US" smtClean="0"/>
-              <a:t>9/16/26</a:t>
+              <a:t>9/17/2026</a:t>
             </a:fld>
             <a:endParaRPr lang="en-US"/>
           </a:p>
@@ -2481,7 +2489,7 @@
           <a:p>
             <a:fld id="{C201A91A-3286-664F-B181-3F299156E507}" type="datetimeFigureOut">
               <a:rPr lang="en-US" smtClean="0"/>
-              <a:t>9/16/26</a:t>
+              <a:t>9/17/2026</a:t>
             </a:fld>
             <a:endParaRPr lang="en-US"/>
           </a:p>
@@ -2622,7 +2630,7 @@
           <a:p>
             <a:fld id="{C201A91A-3286-664F-B181-3F299156E507}" type="datetimeFigureOut">
               <a:rPr lang="en-US" smtClean="0"/>
-              <a:t>9/16/26</a:t>
+              <a:t>9/17/2026</a:t>
             </a:fld>
             <a:endParaRPr lang="en-US"/>
           </a:p>
@@ -2735,7 +2743,7 @@
           <a:p>
             <a:fld id="{C201A91A-3286-664F-B181-3F299156E507}" type="datetimeFigureOut">
               <a:rPr lang="en-US" smtClean="0"/>
-              <a:t>9/16/26</a:t>
+              <a:t>9/17/2026</a:t>
             </a:fld>
             <a:endParaRPr lang="en-US"/>
           </a:p>
@@ -3046,7 +3054,7 @@
           <a:p>
             <a:fld id="{C201A91A-3286-664F-B181-3F299156E507}" type="datetimeFigureOut">
               <a:rPr lang="en-US" smtClean="0"/>
-              <a:t>9/16/26</a:t>
+              <a:t>9/17/2026</a:t>
             </a:fld>
             <a:endParaRPr lang="en-US"/>
           </a:p>
@@ -3334,7 +3342,7 @@
           <a:p>
             <a:fld id="{C201A91A-3286-664F-B181-3F299156E507}" type="datetimeFigureOut">
               <a:rPr lang="en-US" smtClean="0"/>
-              <a:t>9/16/26</a:t>
+              <a:t>9/17/2026</a:t>
             </a:fld>
             <a:endParaRPr lang="en-US"/>
           </a:p>
@@ -3575,7 +3583,7 @@
           <a:p>
             <a:fld id="{C201A91A-3286-664F-B181-3F299156E507}" type="datetimeFigureOut">
               <a:rPr lang="en-US" smtClean="0"/>
-              <a:t>9/16/26</a:t>
+              <a:t>9/17/2026</a:t>
             </a:fld>
             <a:endParaRPr lang="en-US"/>
           </a:p>
@@ -6903,10 +6911,10 @@
       </p:sp>
       <p:sp>
         <p:nvSpPr>
-          <p:cNvPr id="4" name="TextBox 3">
-            <a:extLst>
-              <a:ext uri="{FF2B5EF4-FFF2-40B4-BE49-F238E27FC236}">
-                <a16:creationId xmlns:a16="http://schemas.microsoft.com/office/drawing/2014/main" id="{77DA0718-939E-4523-B84D-DB614629FC1F}"/>
+          <p:cNvPr id="5" name="TextBox 4">
+            <a:extLst>
+              <a:ext uri="{FF2B5EF4-FFF2-40B4-BE49-F238E27FC236}">
+                <a16:creationId xmlns:a16="http://schemas.microsoft.com/office/drawing/2014/main" id="{846B037C-B188-B40E-B87A-F8402F3908BF}"/>
               </a:ext>
             </a:extLst>
           </p:cNvPr>
@@ -6915,8 +6923,8 @@
         </p:nvSpPr>
         <p:spPr>
           <a:xfrm>
-            <a:off x="2810256" y="376437"/>
-            <a:ext cx="6205728" cy="6463308"/>
+            <a:off x="2910253" y="1265818"/>
+            <a:ext cx="3701562" cy="3693319"/>
           </a:xfrm>
           <a:prstGeom prst="rect">
             <a:avLst/>
@@ -6930,144 +6938,81 @@
           <a:lstStyle/>
           <a:p>
             <a:r>
+              <a:rPr lang="en-US" dirty="0"/>
+              <a:t>Wii Remote</a:t>
+            </a:r>
+          </a:p>
+          <a:p>
+            <a:r>
+              <a:rPr lang="en-US" dirty="0"/>
+              <a:t>   ↓ Bluetooth HID</a:t>
+            </a:r>
+          </a:p>
+          <a:p>
+            <a:r>
+              <a:rPr lang="en-US" dirty="0"/>
+              <a:t>wiimote_input.py</a:t>
+            </a:r>
+          </a:p>
+          <a:p>
+            <a:r>
+              <a:rPr lang="en-US" dirty="0"/>
+              <a:t>   ↓</a:t>
+            </a:r>
+          </a:p>
+          <a:p>
+            <a:r>
+              <a:rPr lang="en-US" dirty="0"/>
+              <a:t>angle relative to calibrated zero</a:t>
+            </a:r>
+          </a:p>
+          <a:p>
+            <a:r>
+              <a:rPr lang="en-US" dirty="0"/>
+              <a:t>   ↓</a:t>
+            </a:r>
+          </a:p>
+          <a:p>
+            <a:r>
+              <a:rPr lang="en-US" dirty="0"/>
+              <a:t>normalized value 0.0–1.0</a:t>
+            </a:r>
+          </a:p>
+          <a:p>
+            <a:r>
+              <a:rPr lang="en-US" dirty="0"/>
+              <a:t>   ↓</a:t>
+            </a:r>
+          </a:p>
+          <a:p>
+            <a:r>
               <a:rPr lang="en-US" dirty="0" err="1"/>
-              <a:t>LEDResponseCore</a:t>
-            </a:r>
-            <a:r>
-              <a:rPr lang="en-US" dirty="0"/>
-              <a:t> V1.2.0</a:t>
-            </a:r>
-          </a:p>
-          <a:p>
-            <a:r>
-              <a:rPr lang="en-US" dirty="0"/>
-              <a:t>        ↓</a:t>
-            </a:r>
-          </a:p>
-          <a:p>
-            <a:r>
-              <a:rPr lang="en-US" dirty="0"/>
-              <a:t>Show physical LED/Arduino setup</a:t>
-            </a:r>
-          </a:p>
-          <a:p>
-            <a:r>
-              <a:rPr lang="en-US" dirty="0"/>
-              <a:t>        ↓</a:t>
-            </a:r>
-          </a:p>
-          <a:p>
-            <a:r>
-              <a:rPr lang="en-US" dirty="0"/>
-              <a:t>Keyboard control</a:t>
-            </a:r>
-          </a:p>
-          <a:p>
-            <a:r>
-              <a:rPr lang="en-US" dirty="0"/>
-              <a:t>        ↓</a:t>
-            </a:r>
-          </a:p>
-          <a:p>
-            <a:r>
-              <a:rPr lang="en-US" dirty="0"/>
-              <a:t>Show modular architecture</a:t>
-            </a:r>
-          </a:p>
-          <a:p>
-            <a:r>
-              <a:rPr lang="en-US" dirty="0"/>
-              <a:t>        ↓</a:t>
-            </a:r>
-          </a:p>
-          <a:p>
-            <a:r>
-              <a:rPr lang="en-US" dirty="0"/>
-              <a:t>Wii Remote connection</a:t>
-            </a:r>
-          </a:p>
-          <a:p>
-            <a:r>
-              <a:rPr lang="en-US" dirty="0"/>
-              <a:t>        ↓</a:t>
-            </a:r>
-          </a:p>
-          <a:p>
-            <a:r>
-              <a:rPr lang="en-US" dirty="0"/>
-              <a:t>Wheel mode</a:t>
-            </a:r>
-          </a:p>
-          <a:p>
-            <a:r>
-              <a:rPr lang="en-US" dirty="0"/>
-              <a:t>        ↓</a:t>
-            </a:r>
-          </a:p>
-          <a:p>
-            <a:r>
-              <a:rPr lang="en-US" dirty="0"/>
-              <a:t>Set Zero Reference</a:t>
-            </a:r>
-          </a:p>
-          <a:p>
-            <a:r>
-              <a:rPr lang="en-US" dirty="0"/>
-              <a:t>        ↓</a:t>
-            </a:r>
-          </a:p>
-          <a:p>
-            <a:r>
-              <a:rPr lang="en-US" dirty="0"/>
-              <a:t>Rotate left / center / right</a:t>
-            </a:r>
-          </a:p>
-          <a:p>
-            <a:r>
-              <a:rPr lang="en-US" dirty="0"/>
-              <a:t>        ↓</a:t>
-            </a:r>
-          </a:p>
-          <a:p>
-            <a:r>
-              <a:rPr lang="en-US" dirty="0"/>
-              <a:t>Show corresponding LEDs / azimuth</a:t>
-            </a:r>
-          </a:p>
-          <a:p>
-            <a:r>
-              <a:rPr lang="en-US" dirty="0"/>
-              <a:t>        ↓</a:t>
-            </a:r>
-          </a:p>
-          <a:p>
-            <a:r>
-              <a:rPr lang="en-US" dirty="0"/>
-              <a:t>Briefly show experimental free-pointing mode</a:t>
-            </a:r>
-          </a:p>
-          <a:p>
-            <a:r>
-              <a:rPr lang="en-US" dirty="0"/>
-              <a:t>        ↓</a:t>
-            </a:r>
-          </a:p>
-          <a:p>
-            <a:r>
-              <a:rPr lang="en-US" dirty="0"/>
-              <a:t>Discuss limitations</a:t>
-            </a:r>
-          </a:p>
-          <a:p>
-            <a:r>
-              <a:rPr lang="en-US" dirty="0"/>
-              <a:t>        ↓</a:t>
-            </a:r>
-          </a:p>
-          <a:p>
-            <a:r>
-              <a:rPr lang="en-US" dirty="0"/>
-              <a:t>Ask for requirements / next-phase direction</a:t>
+              <a:t>LEDResponseController</a:t>
+            </a:r>
+            <a:endParaRPr lang="en-US" dirty="0"/>
+          </a:p>
+          <a:p>
+            <a:r>
+              <a:rPr lang="en-US" dirty="0"/>
+              <a:t>   ↓</a:t>
+            </a:r>
+          </a:p>
+          <a:p>
+            <a:r>
+              <a:rPr lang="en-US" dirty="0"/>
+              <a:t>LED index</a:t>
+            </a:r>
+          </a:p>
+          <a:p>
+            <a:r>
+              <a:rPr lang="en-US" dirty="0"/>
+              <a:t>   ↓</a:t>
+            </a:r>
+          </a:p>
+          <a:p>
+            <a:r>
+              <a:rPr lang="en-US" dirty="0"/>
+              <a:t>Arduino / LED strip</a:t>
             </a:r>
           </a:p>
         </p:txBody>
@@ -7270,10 +7215,262 @@
           <a:lstStyle/>
           <a:p>
             <a:r>
+              <a:rPr lang="en-US" dirty="0"/>
+              <a:t> Bluetooth HID</a:t>
+            </a:r>
+          </a:p>
+        </p:txBody>
+      </p:sp>
+      <p:sp>
+        <p:nvSpPr>
+          <p:cNvPr id="4" name="TextBox 3">
+            <a:extLst>
+              <a:ext uri="{FF2B5EF4-FFF2-40B4-BE49-F238E27FC236}">
+                <a16:creationId xmlns:a16="http://schemas.microsoft.com/office/drawing/2014/main" id="{17C84633-3849-3FE7-42D3-2523AD7F1008}"/>
+              </a:ext>
+            </a:extLst>
+          </p:cNvPr>
+          <p:cNvSpPr txBox="1"/>
+          <p:nvPr/>
+        </p:nvSpPr>
+        <p:spPr>
+          <a:xfrm>
+            <a:off x="1178169" y="844034"/>
+            <a:ext cx="3411416" cy="369332"/>
+          </a:xfrm>
+          <a:prstGeom prst="rect">
+            <a:avLst/>
+          </a:prstGeom>
+          <a:noFill/>
+        </p:spPr>
+        <p:txBody>
+          <a:bodyPr wrap="square">
+            <a:spAutoFit/>
+          </a:bodyPr>
+          <a:lstStyle/>
+          <a:p>
+            <a:r>
+              <a:rPr lang="en-US"/>
+              <a:t>No Dolphin or another emulator</a:t>
+            </a:r>
+            <a:endParaRPr lang="en-US" dirty="0"/>
+          </a:p>
+        </p:txBody>
+      </p:sp>
+      <p:sp>
+        <p:nvSpPr>
+          <p:cNvPr id="6" name="TextBox 5">
+            <a:extLst>
+              <a:ext uri="{FF2B5EF4-FFF2-40B4-BE49-F238E27FC236}">
+                <a16:creationId xmlns:a16="http://schemas.microsoft.com/office/drawing/2014/main" id="{43AD40CD-631D-56B9-6B7D-BB037E3F58B0}"/>
+              </a:ext>
+            </a:extLst>
+          </p:cNvPr>
+          <p:cNvSpPr txBox="1"/>
+          <p:nvPr/>
+        </p:nvSpPr>
+        <p:spPr>
+          <a:xfrm>
+            <a:off x="1178169" y="1451344"/>
+            <a:ext cx="2523392" cy="369332"/>
+          </a:xfrm>
+          <a:prstGeom prst="rect">
+            <a:avLst/>
+          </a:prstGeom>
+          <a:noFill/>
+        </p:spPr>
+        <p:txBody>
+          <a:bodyPr wrap="square">
+            <a:spAutoFit/>
+          </a:bodyPr>
+          <a:lstStyle/>
+          <a:p>
+            <a:r>
+              <a:rPr lang="en-US" dirty="0"/>
+              <a:t>Python package: </a:t>
+            </a:r>
+            <a:r>
               <a:rPr lang="en-US" dirty="0" err="1"/>
-              <a:t>Main.py</a:t>
+              <a:t>hidapi</a:t>
             </a:r>
             <a:endParaRPr lang="en-US" dirty="0"/>
+          </a:p>
+        </p:txBody>
+      </p:sp>
+      <p:sp>
+        <p:nvSpPr>
+          <p:cNvPr id="8" name="TextBox 7">
+            <a:extLst>
+              <a:ext uri="{FF2B5EF4-FFF2-40B4-BE49-F238E27FC236}">
+                <a16:creationId xmlns:a16="http://schemas.microsoft.com/office/drawing/2014/main" id="{1835B34F-9F79-A1E2-D856-8D125A6B41F2}"/>
+              </a:ext>
+            </a:extLst>
+          </p:cNvPr>
+          <p:cNvSpPr txBox="1"/>
+          <p:nvPr/>
+        </p:nvSpPr>
+        <p:spPr>
+          <a:xfrm>
+            <a:off x="4079631" y="1497510"/>
+            <a:ext cx="1758461" cy="646331"/>
+          </a:xfrm>
+          <a:prstGeom prst="rect">
+            <a:avLst/>
+          </a:prstGeom>
+          <a:noFill/>
+        </p:spPr>
+        <p:txBody>
+          <a:bodyPr wrap="square">
+            <a:spAutoFit/>
+          </a:bodyPr>
+          <a:lstStyle/>
+          <a:p>
+            <a:r>
+              <a:rPr lang="en-US"/>
+              <a:t>VID = 0x057E</a:t>
+            </a:r>
+          </a:p>
+          <a:p>
+            <a:r>
+              <a:rPr lang="en-US"/>
+              <a:t>PID = 0x0306</a:t>
+            </a:r>
+            <a:endParaRPr lang="en-US" dirty="0"/>
+          </a:p>
+        </p:txBody>
+      </p:sp>
+      <p:sp>
+        <p:nvSpPr>
+          <p:cNvPr id="10" name="TextBox 9">
+            <a:extLst>
+              <a:ext uri="{FF2B5EF4-FFF2-40B4-BE49-F238E27FC236}">
+                <a16:creationId xmlns:a16="http://schemas.microsoft.com/office/drawing/2014/main" id="{47D921CA-5D93-95EA-3BF6-55F6DB44A76A}"/>
+              </a:ext>
+            </a:extLst>
+          </p:cNvPr>
+          <p:cNvSpPr txBox="1"/>
+          <p:nvPr/>
+        </p:nvSpPr>
+        <p:spPr>
+          <a:xfrm>
+            <a:off x="1178169" y="2712130"/>
+            <a:ext cx="6154614" cy="2585323"/>
+          </a:xfrm>
+          <a:prstGeom prst="rect">
+            <a:avLst/>
+          </a:prstGeom>
+          <a:noFill/>
+        </p:spPr>
+        <p:txBody>
+          <a:bodyPr wrap="square">
+            <a:spAutoFit/>
+          </a:bodyPr>
+          <a:lstStyle/>
+          <a:p>
+            <a:r>
+              <a:rPr lang="en-US" dirty="0"/>
+              <a:t>Main UI</a:t>
+            </a:r>
+          </a:p>
+          <a:p>
+            <a:r>
+              <a:rPr lang="en-US" dirty="0"/>
+              <a:t>   │</a:t>
+            </a:r>
+          </a:p>
+          <a:p>
+            <a:r>
+              <a:rPr lang="en-US" dirty="0"/>
+              <a:t>   └── Wii-HID reader thread</a:t>
+            </a:r>
+          </a:p>
+          <a:p>
+            <a:r>
+              <a:rPr lang="en-US" dirty="0"/>
+              <a:t>             ↓</a:t>
+            </a:r>
+          </a:p>
+          <a:p>
+            <a:r>
+              <a:rPr lang="en-US" dirty="0"/>
+              <a:t>       read HID reports</a:t>
+            </a:r>
+          </a:p>
+          <a:p>
+            <a:r>
+              <a:rPr lang="en-US" dirty="0"/>
+              <a:t>             ↓</a:t>
+            </a:r>
+          </a:p>
+          <a:p>
+            <a:r>
+              <a:rPr lang="en-US" dirty="0"/>
+              <a:t>       decode buttons</a:t>
+            </a:r>
+          </a:p>
+          <a:p>
+            <a:r>
+              <a:rPr lang="en-US" dirty="0"/>
+              <a:t>       decode accelerometer</a:t>
+            </a:r>
+          </a:p>
+          <a:p>
+            <a:r>
+              <a:rPr lang="en-US" dirty="0"/>
+              <a:t>       decode </a:t>
+            </a:r>
+            <a:r>
+              <a:rPr lang="en-US" dirty="0" err="1"/>
+              <a:t>MotionPlus</a:t>
+            </a:r>
+            <a:endParaRPr lang="en-US" dirty="0"/>
+          </a:p>
+        </p:txBody>
+      </p:sp>
+      <p:sp>
+        <p:nvSpPr>
+          <p:cNvPr id="12" name="TextBox 11">
+            <a:extLst>
+              <a:ext uri="{FF2B5EF4-FFF2-40B4-BE49-F238E27FC236}">
+                <a16:creationId xmlns:a16="http://schemas.microsoft.com/office/drawing/2014/main" id="{7ACFCAC7-C410-2962-F803-BA58D956D921}"/>
+              </a:ext>
+            </a:extLst>
+          </p:cNvPr>
+          <p:cNvSpPr txBox="1"/>
+          <p:nvPr/>
+        </p:nvSpPr>
+        <p:spPr>
+          <a:xfrm>
+            <a:off x="4747847" y="4004791"/>
+            <a:ext cx="1749668" cy="369332"/>
+          </a:xfrm>
+          <a:prstGeom prst="rect">
+            <a:avLst/>
+          </a:prstGeom>
+          <a:noFill/>
+        </p:spPr>
+        <p:txBody>
+          <a:bodyPr wrap="square">
+            <a:spAutoFit/>
+          </a:bodyPr>
+          <a:lstStyle/>
+          <a:p>
+            <a:r>
+              <a:rPr lang="en-US" dirty="0" err="1">
+                <a:solidFill>
+                  <a:srgbClr val="FF0000"/>
+                </a:solidFill>
+              </a:rPr>
+              <a:t>device.read</a:t>
+            </a:r>
+            <a:r>
+              <a:rPr lang="en-US" dirty="0">
+                <a:solidFill>
+                  <a:srgbClr val="FF0000"/>
+                </a:solidFill>
+              </a:rPr>
+              <a:t>(...)</a:t>
+            </a:r>
           </a:p>
         </p:txBody>
       </p:sp>
@@ -7342,10 +7539,737 @@
           <a:lstStyle/>
           <a:p>
             <a:r>
-              <a:rPr lang="en-US" dirty="0" err="1"/>
-              <a:t>Main.py</a:t>
+              <a:rPr lang="en-US" dirty="0"/>
+              <a:t>Wheel Mode</a:t>
+            </a:r>
+          </a:p>
+        </p:txBody>
+      </p:sp>
+      <p:sp>
+        <p:nvSpPr>
+          <p:cNvPr id="4" name="TextBox 3">
+            <a:extLst>
+              <a:ext uri="{FF2B5EF4-FFF2-40B4-BE49-F238E27FC236}">
+                <a16:creationId xmlns:a16="http://schemas.microsoft.com/office/drawing/2014/main" id="{6D847F3A-4AB4-DE41-9777-2ADCBC5FB76C}"/>
+              </a:ext>
+            </a:extLst>
+          </p:cNvPr>
+          <p:cNvSpPr txBox="1"/>
+          <p:nvPr/>
+        </p:nvSpPr>
+        <p:spPr>
+          <a:xfrm>
+            <a:off x="1072662" y="1384721"/>
+            <a:ext cx="6207368" cy="923330"/>
+          </a:xfrm>
+          <a:prstGeom prst="rect">
+            <a:avLst/>
+          </a:prstGeom>
+          <a:noFill/>
+        </p:spPr>
+        <p:txBody>
+          <a:bodyPr wrap="square">
+            <a:spAutoFit/>
+          </a:bodyPr>
+          <a:lstStyle/>
+          <a:p>
+            <a:r>
+              <a:rPr lang="en-US" dirty="0"/>
+              <a:t>X acceleration</a:t>
+            </a:r>
+          </a:p>
+          <a:p>
+            <a:r>
+              <a:rPr lang="en-US" dirty="0"/>
+              <a:t>Y acceleration</a:t>
+            </a:r>
+          </a:p>
+          <a:p>
+            <a:r>
+              <a:rPr lang="en-US" dirty="0"/>
+              <a:t>Z acceleration</a:t>
+            </a:r>
+          </a:p>
+        </p:txBody>
+      </p:sp>
+      <p:sp>
+        <p:nvSpPr>
+          <p:cNvPr id="6" name="TextBox 5">
+            <a:extLst>
+              <a:ext uri="{FF2B5EF4-FFF2-40B4-BE49-F238E27FC236}">
+                <a16:creationId xmlns:a16="http://schemas.microsoft.com/office/drawing/2014/main" id="{B43ACDE0-A0EF-EC9A-875B-063DD6CC88B7}"/>
+              </a:ext>
+            </a:extLst>
+          </p:cNvPr>
+          <p:cNvSpPr txBox="1"/>
+          <p:nvPr/>
+        </p:nvSpPr>
+        <p:spPr>
+          <a:xfrm>
+            <a:off x="404446" y="848362"/>
+            <a:ext cx="6207368" cy="369332"/>
+          </a:xfrm>
+          <a:prstGeom prst="rect">
+            <a:avLst/>
+          </a:prstGeom>
+          <a:noFill/>
+        </p:spPr>
+        <p:txBody>
+          <a:bodyPr wrap="square">
+            <a:spAutoFit/>
+          </a:bodyPr>
+          <a:lstStyle/>
+          <a:p>
+            <a:r>
+              <a:rPr lang="en-US" dirty="0"/>
+              <a:t>measures gravity along the controller's axes:</a:t>
+            </a:r>
+          </a:p>
+        </p:txBody>
+      </p:sp>
+      <p:sp>
+        <p:nvSpPr>
+          <p:cNvPr id="8" name="TextBox 7">
+            <a:extLst>
+              <a:ext uri="{FF2B5EF4-FFF2-40B4-BE49-F238E27FC236}">
+                <a16:creationId xmlns:a16="http://schemas.microsoft.com/office/drawing/2014/main" id="{71DF6EB6-C34D-FF45-D961-7D598F785C27}"/>
+              </a:ext>
+            </a:extLst>
+          </p:cNvPr>
+          <p:cNvSpPr txBox="1"/>
+          <p:nvPr/>
+        </p:nvSpPr>
+        <p:spPr>
+          <a:xfrm>
+            <a:off x="404446" y="2569504"/>
+            <a:ext cx="8396654" cy="369332"/>
+          </a:xfrm>
+          <a:prstGeom prst="rect">
+            <a:avLst/>
+          </a:prstGeom>
+          <a:noFill/>
+        </p:spPr>
+        <p:txBody>
+          <a:bodyPr wrap="square">
+            <a:spAutoFit/>
+          </a:bodyPr>
+          <a:lstStyle/>
+          <a:p>
+            <a:r>
+              <a:rPr lang="en-US" dirty="0"/>
+              <a:t>When the controller rotates, the direction of gravity relative to those axes changes.</a:t>
+            </a:r>
+          </a:p>
+        </p:txBody>
+      </p:sp>
+      <p:sp>
+        <p:nvSpPr>
+          <p:cNvPr id="10" name="TextBox 9">
+            <a:extLst>
+              <a:ext uri="{FF2B5EF4-FFF2-40B4-BE49-F238E27FC236}">
+                <a16:creationId xmlns:a16="http://schemas.microsoft.com/office/drawing/2014/main" id="{D8A82C26-886E-1B47-F2EB-95664B96847E}"/>
+              </a:ext>
+            </a:extLst>
+          </p:cNvPr>
+          <p:cNvSpPr txBox="1"/>
+          <p:nvPr/>
+        </p:nvSpPr>
+        <p:spPr>
+          <a:xfrm>
+            <a:off x="1072662" y="3181142"/>
+            <a:ext cx="2110153" cy="369332"/>
+          </a:xfrm>
+          <a:prstGeom prst="rect">
+            <a:avLst/>
+          </a:prstGeom>
+          <a:noFill/>
+        </p:spPr>
+        <p:txBody>
+          <a:bodyPr wrap="square">
+            <a:spAutoFit/>
+          </a:bodyPr>
+          <a:lstStyle/>
+          <a:p>
+            <a:r>
+              <a:rPr lang="en-US" dirty="0">
+                <a:solidFill>
+                  <a:srgbClr val="FF0000"/>
+                </a:solidFill>
+              </a:rPr>
+              <a:t>atan2(axis1, axis2)</a:t>
+            </a:r>
+          </a:p>
+        </p:txBody>
+      </p:sp>
+      <p:sp>
+        <p:nvSpPr>
+          <p:cNvPr id="21" name="Rectangle 20">
+            <a:extLst>
+              <a:ext uri="{FF2B5EF4-FFF2-40B4-BE49-F238E27FC236}">
+                <a16:creationId xmlns:a16="http://schemas.microsoft.com/office/drawing/2014/main" id="{C9A415F1-4530-5E8C-A167-44E82351C8DD}"/>
+              </a:ext>
+            </a:extLst>
+          </p:cNvPr>
+          <p:cNvSpPr/>
+          <p:nvPr/>
+        </p:nvSpPr>
+        <p:spPr>
+          <a:xfrm>
+            <a:off x="4290647" y="3429000"/>
+            <a:ext cx="1688124" cy="571500"/>
+          </a:xfrm>
+          <a:prstGeom prst="rect">
+            <a:avLst/>
+          </a:prstGeom>
+        </p:spPr>
+        <p:style>
+          <a:lnRef idx="2">
+            <a:schemeClr val="accent1">
+              <a:shade val="15000"/>
+            </a:schemeClr>
+          </a:lnRef>
+          <a:fillRef idx="1">
+            <a:schemeClr val="accent1"/>
+          </a:fillRef>
+          <a:effectRef idx="0">
+            <a:schemeClr val="accent1"/>
+          </a:effectRef>
+          <a:fontRef idx="minor">
+            <a:schemeClr val="lt1"/>
+          </a:fontRef>
+        </p:style>
+        <p:txBody>
+          <a:bodyPr rtlCol="0" anchor="ctr"/>
+          <a:lstStyle/>
+          <a:p>
+            <a:pPr algn="ctr"/>
+            <a:r>
+              <a:rPr lang="en-US" dirty="0"/>
+              <a:t> gravity</a:t>
+            </a:r>
+          </a:p>
+        </p:txBody>
+      </p:sp>
+      <p:cxnSp>
+        <p:nvCxnSpPr>
+          <p:cNvPr id="22" name="Straight Arrow Connector 21">
+            <a:extLst>
+              <a:ext uri="{FF2B5EF4-FFF2-40B4-BE49-F238E27FC236}">
+                <a16:creationId xmlns:a16="http://schemas.microsoft.com/office/drawing/2014/main" id="{98361621-3739-B00B-3C2A-79696C8EB387}"/>
+              </a:ext>
+            </a:extLst>
+          </p:cNvPr>
+          <p:cNvCxnSpPr>
+            <a:stCxn id="21" idx="2"/>
+          </p:cNvCxnSpPr>
+          <p:nvPr/>
+        </p:nvCxnSpPr>
+        <p:spPr>
+          <a:xfrm>
+            <a:off x="5134709" y="4000500"/>
+            <a:ext cx="17585" cy="437368"/>
+          </a:xfrm>
+          <a:prstGeom prst="straightConnector1">
+            <a:avLst/>
+          </a:prstGeom>
+          <a:ln>
+            <a:tailEnd type="triangle"/>
+          </a:ln>
+        </p:spPr>
+        <p:style>
+          <a:lnRef idx="2">
+            <a:schemeClr val="accent1"/>
+          </a:lnRef>
+          <a:fillRef idx="0">
+            <a:schemeClr val="accent1"/>
+          </a:fillRef>
+          <a:effectRef idx="1">
+            <a:schemeClr val="accent1"/>
+          </a:effectRef>
+          <a:fontRef idx="minor">
+            <a:schemeClr val="tx1"/>
+          </a:fontRef>
+        </p:style>
+      </p:cxnSp>
+      <p:sp>
+        <p:nvSpPr>
+          <p:cNvPr id="23" name="Rectangle 22">
+            <a:extLst>
+              <a:ext uri="{FF2B5EF4-FFF2-40B4-BE49-F238E27FC236}">
+                <a16:creationId xmlns:a16="http://schemas.microsoft.com/office/drawing/2014/main" id="{BAB9A674-1AEA-86ED-4F63-A8058D4A80A0}"/>
+              </a:ext>
+            </a:extLst>
+          </p:cNvPr>
+          <p:cNvSpPr/>
+          <p:nvPr/>
+        </p:nvSpPr>
+        <p:spPr>
+          <a:xfrm>
+            <a:off x="4308232" y="4478006"/>
+            <a:ext cx="1688124" cy="571500"/>
+          </a:xfrm>
+          <a:prstGeom prst="rect">
+            <a:avLst/>
+          </a:prstGeom>
+        </p:spPr>
+        <p:style>
+          <a:lnRef idx="2">
+            <a:schemeClr val="accent1">
+              <a:shade val="15000"/>
+            </a:schemeClr>
+          </a:lnRef>
+          <a:fillRef idx="1">
+            <a:schemeClr val="accent1"/>
+          </a:fillRef>
+          <a:effectRef idx="0">
+            <a:schemeClr val="accent1"/>
+          </a:effectRef>
+          <a:fontRef idx="minor">
+            <a:schemeClr val="lt1"/>
+          </a:fontRef>
+        </p:style>
+        <p:txBody>
+          <a:bodyPr rtlCol="0" anchor="ctr"/>
+          <a:lstStyle/>
+          <a:p>
+            <a:pPr algn="ctr"/>
+            <a:r>
+              <a:rPr lang="en-US" dirty="0"/>
+              <a:t> Wii Remote orientation</a:t>
+            </a:r>
+          </a:p>
+        </p:txBody>
+      </p:sp>
+      <p:sp>
+        <p:nvSpPr>
+          <p:cNvPr id="24" name="Rectangle 23">
+            <a:extLst>
+              <a:ext uri="{FF2B5EF4-FFF2-40B4-BE49-F238E27FC236}">
+                <a16:creationId xmlns:a16="http://schemas.microsoft.com/office/drawing/2014/main" id="{887D8479-8B9A-A554-0114-72B37B90F522}"/>
+              </a:ext>
+            </a:extLst>
+          </p:cNvPr>
+          <p:cNvSpPr/>
+          <p:nvPr/>
+        </p:nvSpPr>
+        <p:spPr>
+          <a:xfrm>
+            <a:off x="3941886" y="5352310"/>
+            <a:ext cx="1931376" cy="571500"/>
+          </a:xfrm>
+          <a:prstGeom prst="rect">
+            <a:avLst/>
+          </a:prstGeom>
+        </p:spPr>
+        <p:style>
+          <a:lnRef idx="2">
+            <a:schemeClr val="accent1">
+              <a:shade val="15000"/>
+            </a:schemeClr>
+          </a:lnRef>
+          <a:fillRef idx="1">
+            <a:schemeClr val="accent1"/>
+          </a:fillRef>
+          <a:effectRef idx="0">
+            <a:schemeClr val="accent1"/>
+          </a:effectRef>
+          <a:fontRef idx="minor">
+            <a:schemeClr val="lt1"/>
+          </a:fontRef>
+        </p:style>
+        <p:txBody>
+          <a:bodyPr rtlCol="0" anchor="ctr"/>
+          <a:lstStyle/>
+          <a:p>
+            <a:pPr algn="ctr"/>
+            <a:r>
+              <a:rPr lang="en-US" dirty="0"/>
+              <a:t>Accelerometer X</a:t>
+            </a:r>
+          </a:p>
+        </p:txBody>
+      </p:sp>
+      <p:sp>
+        <p:nvSpPr>
+          <p:cNvPr id="26" name="Rectangle 25">
+            <a:extLst>
+              <a:ext uri="{FF2B5EF4-FFF2-40B4-BE49-F238E27FC236}">
+                <a16:creationId xmlns:a16="http://schemas.microsoft.com/office/drawing/2014/main" id="{2361589F-9966-E4CC-11FE-74E4F38A7C22}"/>
+              </a:ext>
+            </a:extLst>
+          </p:cNvPr>
+          <p:cNvSpPr/>
+          <p:nvPr/>
+        </p:nvSpPr>
+        <p:spPr>
+          <a:xfrm>
+            <a:off x="3941886" y="6128224"/>
+            <a:ext cx="1931376" cy="571500"/>
+          </a:xfrm>
+          <a:prstGeom prst="rect">
+            <a:avLst/>
+          </a:prstGeom>
+        </p:spPr>
+        <p:style>
+          <a:lnRef idx="2">
+            <a:schemeClr val="accent1">
+              <a:shade val="15000"/>
+            </a:schemeClr>
+          </a:lnRef>
+          <a:fillRef idx="1">
+            <a:schemeClr val="accent1"/>
+          </a:fillRef>
+          <a:effectRef idx="0">
+            <a:schemeClr val="accent1"/>
+          </a:effectRef>
+          <a:fontRef idx="minor">
+            <a:schemeClr val="lt1"/>
+          </a:fontRef>
+        </p:style>
+        <p:txBody>
+          <a:bodyPr rtlCol="0" anchor="ctr"/>
+          <a:lstStyle/>
+          <a:p>
+            <a:pPr algn="ctr"/>
+            <a:r>
+              <a:rPr lang="en-US" dirty="0"/>
+              <a:t>Accelerometer Y</a:t>
+            </a:r>
+          </a:p>
+        </p:txBody>
+      </p:sp>
+      <p:cxnSp>
+        <p:nvCxnSpPr>
+          <p:cNvPr id="27" name="Straight Arrow Connector 26">
+            <a:extLst>
+              <a:ext uri="{FF2B5EF4-FFF2-40B4-BE49-F238E27FC236}">
+                <a16:creationId xmlns:a16="http://schemas.microsoft.com/office/drawing/2014/main" id="{61BBC924-9FBB-F1EE-A057-0F3787FDF083}"/>
+              </a:ext>
+            </a:extLst>
+          </p:cNvPr>
+          <p:cNvCxnSpPr>
+            <a:cxnSpLocks/>
+            <a:endCxn id="24" idx="0"/>
+          </p:cNvCxnSpPr>
+          <p:nvPr/>
+        </p:nvCxnSpPr>
+        <p:spPr>
+          <a:xfrm flipH="1">
+            <a:off x="4907574" y="5035911"/>
+            <a:ext cx="235927" cy="316399"/>
+          </a:xfrm>
+          <a:prstGeom prst="straightConnector1">
+            <a:avLst/>
+          </a:prstGeom>
+          <a:ln>
+            <a:tailEnd type="triangle"/>
+          </a:ln>
+        </p:spPr>
+        <p:style>
+          <a:lnRef idx="2">
+            <a:schemeClr val="accent1"/>
+          </a:lnRef>
+          <a:fillRef idx="0">
+            <a:schemeClr val="accent1"/>
+          </a:fillRef>
+          <a:effectRef idx="1">
+            <a:schemeClr val="accent1"/>
+          </a:effectRef>
+          <a:fontRef idx="minor">
+            <a:schemeClr val="tx1"/>
+          </a:fontRef>
+        </p:style>
+      </p:cxnSp>
+      <p:cxnSp>
+        <p:nvCxnSpPr>
+          <p:cNvPr id="29" name="Straight Arrow Connector 28">
+            <a:extLst>
+              <a:ext uri="{FF2B5EF4-FFF2-40B4-BE49-F238E27FC236}">
+                <a16:creationId xmlns:a16="http://schemas.microsoft.com/office/drawing/2014/main" id="{B69EF9E2-4D03-E138-9302-1D685474263F}"/>
+              </a:ext>
+            </a:extLst>
+          </p:cNvPr>
+          <p:cNvCxnSpPr>
+            <a:cxnSpLocks/>
+            <a:stCxn id="24" idx="3"/>
+          </p:cNvCxnSpPr>
+          <p:nvPr/>
+        </p:nvCxnSpPr>
+        <p:spPr>
+          <a:xfrm>
+            <a:off x="5873262" y="5638060"/>
+            <a:ext cx="1230923" cy="147278"/>
+          </a:xfrm>
+          <a:prstGeom prst="straightConnector1">
+            <a:avLst/>
+          </a:prstGeom>
+          <a:ln>
+            <a:tailEnd type="triangle"/>
+          </a:ln>
+        </p:spPr>
+        <p:style>
+          <a:lnRef idx="2">
+            <a:schemeClr val="accent1"/>
+          </a:lnRef>
+          <a:fillRef idx="0">
+            <a:schemeClr val="accent1"/>
+          </a:fillRef>
+          <a:effectRef idx="1">
+            <a:schemeClr val="accent1"/>
+          </a:effectRef>
+          <a:fontRef idx="minor">
+            <a:schemeClr val="tx1"/>
+          </a:fontRef>
+        </p:style>
+      </p:cxnSp>
+      <p:cxnSp>
+        <p:nvCxnSpPr>
+          <p:cNvPr id="32" name="Straight Arrow Connector 31">
+            <a:extLst>
+              <a:ext uri="{FF2B5EF4-FFF2-40B4-BE49-F238E27FC236}">
+                <a16:creationId xmlns:a16="http://schemas.microsoft.com/office/drawing/2014/main" id="{7C006876-34AA-1EB8-24B3-6E60ECE227E4}"/>
+              </a:ext>
+            </a:extLst>
+          </p:cNvPr>
+          <p:cNvCxnSpPr>
+            <a:cxnSpLocks/>
+          </p:cNvCxnSpPr>
+          <p:nvPr/>
+        </p:nvCxnSpPr>
+        <p:spPr>
+          <a:xfrm flipV="1">
+            <a:off x="5873262" y="5989752"/>
+            <a:ext cx="1230923" cy="441096"/>
+          </a:xfrm>
+          <a:prstGeom prst="straightConnector1">
+            <a:avLst/>
+          </a:prstGeom>
+          <a:ln>
+            <a:tailEnd type="triangle"/>
+          </a:ln>
+        </p:spPr>
+        <p:style>
+          <a:lnRef idx="2">
+            <a:schemeClr val="accent1"/>
+          </a:lnRef>
+          <a:fillRef idx="0">
+            <a:schemeClr val="accent1"/>
+          </a:fillRef>
+          <a:effectRef idx="1">
+            <a:schemeClr val="accent1"/>
+          </a:effectRef>
+          <a:fontRef idx="minor">
+            <a:schemeClr val="tx1"/>
+          </a:fontRef>
+        </p:style>
+      </p:cxnSp>
+      <p:sp>
+        <p:nvSpPr>
+          <p:cNvPr id="35" name="TextBox 34">
+            <a:extLst>
+              <a:ext uri="{FF2B5EF4-FFF2-40B4-BE49-F238E27FC236}">
+                <a16:creationId xmlns:a16="http://schemas.microsoft.com/office/drawing/2014/main" id="{FEAEE143-EA71-1597-C978-D978054036C7}"/>
+              </a:ext>
+            </a:extLst>
+          </p:cNvPr>
+          <p:cNvSpPr txBox="1"/>
+          <p:nvPr/>
+        </p:nvSpPr>
+        <p:spPr>
+          <a:xfrm>
+            <a:off x="7280030" y="5680403"/>
+            <a:ext cx="931985" cy="369332"/>
+          </a:xfrm>
+          <a:prstGeom prst="rect">
+            <a:avLst/>
+          </a:prstGeom>
+          <a:noFill/>
+        </p:spPr>
+        <p:txBody>
+          <a:bodyPr wrap="square">
+            <a:spAutoFit/>
+          </a:bodyPr>
+          <a:lstStyle/>
+          <a:p>
+            <a:r>
+              <a:rPr lang="en-US" sz="1800" dirty="0"/>
+              <a:t>atan2() </a:t>
             </a:r>
             <a:endParaRPr lang="en-US" dirty="0"/>
+          </a:p>
+        </p:txBody>
+      </p:sp>
+      <p:sp>
+        <p:nvSpPr>
+          <p:cNvPr id="37" name="Rectangle 36">
+            <a:extLst>
+              <a:ext uri="{FF2B5EF4-FFF2-40B4-BE49-F238E27FC236}">
+                <a16:creationId xmlns:a16="http://schemas.microsoft.com/office/drawing/2014/main" id="{7EB795A2-038B-FE6A-2B89-48CF368BB465}"/>
+              </a:ext>
+            </a:extLst>
+          </p:cNvPr>
+          <p:cNvSpPr/>
+          <p:nvPr/>
+        </p:nvSpPr>
+        <p:spPr>
+          <a:xfrm>
+            <a:off x="9267091" y="5583701"/>
+            <a:ext cx="1688124" cy="571500"/>
+          </a:xfrm>
+          <a:prstGeom prst="rect">
+            <a:avLst/>
+          </a:prstGeom>
+        </p:spPr>
+        <p:style>
+          <a:lnRef idx="2">
+            <a:schemeClr val="accent1">
+              <a:shade val="15000"/>
+            </a:schemeClr>
+          </a:lnRef>
+          <a:fillRef idx="1">
+            <a:schemeClr val="accent1"/>
+          </a:fillRef>
+          <a:effectRef idx="0">
+            <a:schemeClr val="accent1"/>
+          </a:effectRef>
+          <a:fontRef idx="minor">
+            <a:schemeClr val="lt1"/>
+          </a:fontRef>
+        </p:style>
+        <p:txBody>
+          <a:bodyPr rtlCol="0" anchor="ctr"/>
+          <a:lstStyle/>
+          <a:p>
+            <a:pPr algn="ctr"/>
+            <a:r>
+              <a:rPr lang="en-US" dirty="0"/>
+              <a:t> angle</a:t>
+            </a:r>
+          </a:p>
+        </p:txBody>
+      </p:sp>
+      <p:cxnSp>
+        <p:nvCxnSpPr>
+          <p:cNvPr id="38" name="Straight Arrow Connector 37">
+            <a:extLst>
+              <a:ext uri="{FF2B5EF4-FFF2-40B4-BE49-F238E27FC236}">
+                <a16:creationId xmlns:a16="http://schemas.microsoft.com/office/drawing/2014/main" id="{FACCDB33-4B4E-5476-731E-F67C7857749E}"/>
+              </a:ext>
+            </a:extLst>
+          </p:cNvPr>
+          <p:cNvCxnSpPr>
+            <a:cxnSpLocks/>
+            <a:stCxn id="35" idx="3"/>
+            <a:endCxn id="37" idx="1"/>
+          </p:cNvCxnSpPr>
+          <p:nvPr/>
+        </p:nvCxnSpPr>
+        <p:spPr>
+          <a:xfrm>
+            <a:off x="8212015" y="5865069"/>
+            <a:ext cx="1055076" cy="4382"/>
+          </a:xfrm>
+          <a:prstGeom prst="straightConnector1">
+            <a:avLst/>
+          </a:prstGeom>
+          <a:ln>
+            <a:tailEnd type="triangle"/>
+          </a:ln>
+        </p:spPr>
+        <p:style>
+          <a:lnRef idx="2">
+            <a:schemeClr val="accent1"/>
+          </a:lnRef>
+          <a:fillRef idx="0">
+            <a:schemeClr val="accent1"/>
+          </a:fillRef>
+          <a:effectRef idx="1">
+            <a:schemeClr val="accent1"/>
+          </a:effectRef>
+          <a:fontRef idx="minor">
+            <a:schemeClr val="tx1"/>
+          </a:fontRef>
+        </p:style>
+      </p:cxnSp>
+      <p:sp>
+        <p:nvSpPr>
+          <p:cNvPr id="42" name="TextBox 41">
+            <a:extLst>
+              <a:ext uri="{FF2B5EF4-FFF2-40B4-BE49-F238E27FC236}">
+                <a16:creationId xmlns:a16="http://schemas.microsoft.com/office/drawing/2014/main" id="{49D9835F-CFB9-B279-4F9C-0FC1E6F5E770}"/>
+              </a:ext>
+            </a:extLst>
+          </p:cNvPr>
+          <p:cNvSpPr txBox="1"/>
+          <p:nvPr/>
+        </p:nvSpPr>
+        <p:spPr>
+          <a:xfrm>
+            <a:off x="548057" y="4788369"/>
+            <a:ext cx="615461" cy="923330"/>
+          </a:xfrm>
+          <a:prstGeom prst="rect">
+            <a:avLst/>
+          </a:prstGeom>
+          <a:noFill/>
+        </p:spPr>
+        <p:txBody>
+          <a:bodyPr wrap="square">
+            <a:spAutoFit/>
+          </a:bodyPr>
+          <a:lstStyle/>
+          <a:p>
+            <a:r>
+              <a:rPr lang="en-US" dirty="0"/>
+              <a:t>XZ</a:t>
+            </a:r>
+          </a:p>
+          <a:p>
+            <a:r>
+              <a:rPr lang="en-US" dirty="0"/>
+              <a:t>XY</a:t>
+            </a:r>
+          </a:p>
+          <a:p>
+            <a:r>
+              <a:rPr lang="en-US" dirty="0"/>
+              <a:t>YZ</a:t>
+            </a:r>
+          </a:p>
+        </p:txBody>
+      </p:sp>
+      <p:sp>
+        <p:nvSpPr>
+          <p:cNvPr id="44" name="TextBox 43">
+            <a:extLst>
+              <a:ext uri="{FF2B5EF4-FFF2-40B4-BE49-F238E27FC236}">
+                <a16:creationId xmlns:a16="http://schemas.microsoft.com/office/drawing/2014/main" id="{BE1D8BC4-B18A-7ED5-ADF9-339DCC167531}"/>
+              </a:ext>
+            </a:extLst>
+          </p:cNvPr>
+          <p:cNvSpPr txBox="1"/>
+          <p:nvPr/>
+        </p:nvSpPr>
+        <p:spPr>
+          <a:xfrm>
+            <a:off x="369278" y="5824972"/>
+            <a:ext cx="2341685" cy="923330"/>
+          </a:xfrm>
+          <a:prstGeom prst="rect">
+            <a:avLst/>
+          </a:prstGeom>
+          <a:noFill/>
+        </p:spPr>
+        <p:txBody>
+          <a:bodyPr wrap="square">
+            <a:spAutoFit/>
+          </a:bodyPr>
+          <a:lstStyle/>
+          <a:p>
+            <a:r>
+              <a:rPr lang="en-US" dirty="0"/>
+              <a:t>depending on how the Wii Remote is physically mounted.</a:t>
+            </a:r>
           </a:p>
         </p:txBody>
       </p:sp>
@@ -7370,7 +8294,7 @@
         <p:cNvPr id="1" name="">
           <a:extLst>
             <a:ext uri="{FF2B5EF4-FFF2-40B4-BE49-F238E27FC236}">
-              <a16:creationId xmlns:a16="http://schemas.microsoft.com/office/drawing/2014/main" id="{A8EAD416-CA09-C10D-983A-E989E87B62B7}"/>
+              <a16:creationId xmlns:a16="http://schemas.microsoft.com/office/drawing/2014/main" id="{33FE85C9-84B6-7E5F-A56B-42539B7A86DA}"/>
             </a:ext>
           </a:extLst>
         </p:cNvPr>
@@ -7390,7 +8314,7 @@
           <p:cNvPr id="2" name="Title 1">
             <a:extLst>
               <a:ext uri="{FF2B5EF4-FFF2-40B4-BE49-F238E27FC236}">
-                <a16:creationId xmlns:a16="http://schemas.microsoft.com/office/drawing/2014/main" id="{8F6419DF-EC1C-39D6-D3F8-2B9D2F779135}"/>
+                <a16:creationId xmlns:a16="http://schemas.microsoft.com/office/drawing/2014/main" id="{F54D74B5-E7FA-4407-7679-EBBE1CDCCA3D}"/>
               </a:ext>
             </a:extLst>
           </p:cNvPr>
@@ -7415,7 +8339,7 @@
           <a:p>
             <a:r>
               <a:rPr lang="en-US" dirty="0"/>
-              <a:t>Ideas</a:t>
+              <a:t>Factory accelerometer calibration</a:t>
             </a:r>
           </a:p>
         </p:txBody>
@@ -7425,7 +8349,7 @@
           <p:cNvPr id="4" name="TextBox 3">
             <a:extLst>
               <a:ext uri="{FF2B5EF4-FFF2-40B4-BE49-F238E27FC236}">
-                <a16:creationId xmlns:a16="http://schemas.microsoft.com/office/drawing/2014/main" id="{0989B220-98E6-A1DA-7B6C-15E50B151C77}"/>
+                <a16:creationId xmlns:a16="http://schemas.microsoft.com/office/drawing/2014/main" id="{3B2B3614-14FE-4475-BBC0-1207094A5384}"/>
               </a:ext>
             </a:extLst>
           </p:cNvPr>
@@ -7434,8 +8358,8 @@
         </p:nvSpPr>
         <p:spPr>
           <a:xfrm>
-            <a:off x="658368" y="946047"/>
-            <a:ext cx="10911840" cy="2862322"/>
+            <a:off x="747345" y="960512"/>
+            <a:ext cx="7104185" cy="369332"/>
           </a:xfrm>
           <a:prstGeom prst="rect">
             <a:avLst/>
@@ -7448,69 +8372,329 @@
           </a:bodyPr>
           <a:lstStyle/>
           <a:p>
-            <a:pPr marL="342900" lvl="0" indent="-342900">
-              <a:buFont typeface="Arial" panose="020B0604020202020204" pitchFamily="34" charset="0"/>
-              <a:buChar char="•"/>
-            </a:pPr>
-            <a:r>
-              <a:rPr lang="en-US" dirty="0"/>
-              <a:t>Should the participant response be </a:t>
-            </a:r>
-            <a:r>
-              <a:rPr lang="en-US" b="1" dirty="0"/>
-              <a:t>wheel-based</a:t>
-            </a:r>
-            <a:r>
-              <a:rPr lang="en-US" dirty="0"/>
-              <a:t>, </a:t>
-            </a:r>
-            <a:r>
-              <a:rPr lang="en-US" b="1" dirty="0"/>
-              <a:t>free pointing</a:t>
-            </a:r>
-            <a:r>
-              <a:rPr lang="en-US" dirty="0"/>
-              <a:t>, or should we continue supporting both? </a:t>
-            </a:r>
-          </a:p>
-          <a:p>
-            <a:pPr marL="342900" lvl="0" indent="-342900">
-              <a:buFont typeface="Arial" panose="020B0604020202020204" pitchFamily="34" charset="0"/>
-              <a:buChar char="•"/>
-            </a:pPr>
-            <a:r>
-              <a:rPr lang="en-US" dirty="0"/>
-              <a:t>Is the LED strip primarily participant feedback, experimenter feedback, or part of the actual response mechanism? </a:t>
-            </a:r>
-          </a:p>
-          <a:p>
-            <a:pPr marL="342900" lvl="0" indent="-342900">
-              <a:buFont typeface="Arial" panose="020B0604020202020204" pitchFamily="34" charset="0"/>
-              <a:buChar char="•"/>
-            </a:pPr>
-            <a:r>
-              <a:rPr lang="en-US" dirty="0"/>
-              <a:t>What angular range do we really need: </a:t>
-            </a:r>
-            <a:r>
-              <a:rPr lang="en-US" dirty="0">
-                <a:latin typeface="+mn-lt"/>
-              </a:rPr>
-              <a:t>±90°</a:t>
-            </a:r>
-            <a:r>
-              <a:rPr lang="en-US" dirty="0"/>
-              <a:t>, </a:t>
-            </a:r>
-            <a:r>
-              <a:rPr lang="en-US" dirty="0">
-                <a:latin typeface="+mn-lt"/>
-              </a:rPr>
-              <a:t>±120°</a:t>
-            </a:r>
-            <a:r>
-              <a:rPr lang="en-US" dirty="0"/>
-              <a:t>, </a:t>
+            <a:r>
+              <a:rPr lang="en-US" dirty="0"/>
+              <a:t>reads the Wii Remote's own factory calibration data from its EEPROM</a:t>
+            </a:r>
+          </a:p>
+        </p:txBody>
+      </p:sp>
+      <p:sp>
+        <p:nvSpPr>
+          <p:cNvPr id="6" name="TextBox 5">
+            <a:extLst>
+              <a:ext uri="{FF2B5EF4-FFF2-40B4-BE49-F238E27FC236}">
+                <a16:creationId xmlns:a16="http://schemas.microsoft.com/office/drawing/2014/main" id="{0619F51A-CE2D-ECA5-AB96-402FA6ADC32E}"/>
+              </a:ext>
+            </a:extLst>
+          </p:cNvPr>
+          <p:cNvSpPr txBox="1"/>
+          <p:nvPr/>
+        </p:nvSpPr>
+        <p:spPr>
+          <a:xfrm>
+            <a:off x="483577" y="1863941"/>
+            <a:ext cx="1749669" cy="369332"/>
+          </a:xfrm>
+          <a:prstGeom prst="rect">
+            <a:avLst/>
+          </a:prstGeom>
+          <a:noFill/>
+        </p:spPr>
+        <p:txBody>
+          <a:bodyPr wrap="square">
+            <a:spAutoFit/>
+          </a:bodyPr>
+          <a:lstStyle/>
+          <a:p>
+            <a:r>
+              <a:rPr lang="en-US"/>
+              <a:t>"Calibrate Zero"</a:t>
+            </a:r>
+            <a:endParaRPr lang="en-US" dirty="0"/>
+          </a:p>
+        </p:txBody>
+      </p:sp>
+      <p:sp>
+        <p:nvSpPr>
+          <p:cNvPr id="8" name="TextBox 7">
+            <a:extLst>
+              <a:ext uri="{FF2B5EF4-FFF2-40B4-BE49-F238E27FC236}">
+                <a16:creationId xmlns:a16="http://schemas.microsoft.com/office/drawing/2014/main" id="{DCA87B57-E558-F639-ADC0-72F70A2B0C30}"/>
+              </a:ext>
+            </a:extLst>
+          </p:cNvPr>
+          <p:cNvSpPr txBox="1"/>
+          <p:nvPr/>
+        </p:nvSpPr>
+        <p:spPr>
+          <a:xfrm>
+            <a:off x="1644162" y="2582704"/>
+            <a:ext cx="2593730" cy="369332"/>
+          </a:xfrm>
+          <a:prstGeom prst="rect">
+            <a:avLst/>
+          </a:prstGeom>
+          <a:noFill/>
+        </p:spPr>
+        <p:txBody>
+          <a:bodyPr wrap="square">
+            <a:spAutoFit/>
+          </a:bodyPr>
+          <a:lstStyle/>
+          <a:p>
+            <a:r>
+              <a:rPr lang="en-US"/>
+              <a:t>Physical Wii angle = 87°</a:t>
+            </a:r>
+            <a:endParaRPr lang="en-US" dirty="0"/>
+          </a:p>
+        </p:txBody>
+      </p:sp>
+      <p:sp>
+        <p:nvSpPr>
+          <p:cNvPr id="10" name="TextBox 9">
+            <a:extLst>
+              <a:ext uri="{FF2B5EF4-FFF2-40B4-BE49-F238E27FC236}">
+                <a16:creationId xmlns:a16="http://schemas.microsoft.com/office/drawing/2014/main" id="{CD63C63E-06F1-4A7C-EBD5-C6090AF0380F}"/>
+              </a:ext>
+            </a:extLst>
+          </p:cNvPr>
+          <p:cNvSpPr txBox="1"/>
+          <p:nvPr/>
+        </p:nvSpPr>
+        <p:spPr>
+          <a:xfrm>
+            <a:off x="1644162" y="3059668"/>
+            <a:ext cx="2760784" cy="369332"/>
+          </a:xfrm>
+          <a:prstGeom prst="rect">
+            <a:avLst/>
+          </a:prstGeom>
+          <a:noFill/>
+        </p:spPr>
+        <p:txBody>
+          <a:bodyPr wrap="square">
+            <a:spAutoFit/>
+          </a:bodyPr>
+          <a:lstStyle/>
+          <a:p>
+            <a:r>
+              <a:rPr lang="en-US" dirty="0" err="1"/>
+              <a:t>zero_reference</a:t>
+            </a:r>
+            <a:r>
+              <a:rPr lang="en-US" dirty="0"/>
+              <a:t> = 87°</a:t>
+            </a:r>
+          </a:p>
+        </p:txBody>
+      </p:sp>
+      <p:sp>
+        <p:nvSpPr>
+          <p:cNvPr id="12" name="TextBox 11">
+            <a:extLst>
+              <a:ext uri="{FF2B5EF4-FFF2-40B4-BE49-F238E27FC236}">
+                <a16:creationId xmlns:a16="http://schemas.microsoft.com/office/drawing/2014/main" id="{C8C48999-7B62-9A94-C2C3-F9ECC741453E}"/>
+              </a:ext>
+            </a:extLst>
+          </p:cNvPr>
+          <p:cNvSpPr txBox="1"/>
+          <p:nvPr/>
+        </p:nvSpPr>
+        <p:spPr>
+          <a:xfrm>
+            <a:off x="1644162" y="3593765"/>
+            <a:ext cx="3191607" cy="369332"/>
+          </a:xfrm>
+          <a:prstGeom prst="rect">
+            <a:avLst/>
+          </a:prstGeom>
+          <a:noFill/>
+        </p:spPr>
+        <p:txBody>
+          <a:bodyPr wrap="square">
+            <a:spAutoFit/>
+          </a:bodyPr>
+          <a:lstStyle/>
+          <a:p>
+            <a:r>
+              <a:rPr lang="en-US" dirty="0"/>
+              <a:t>current angle - zero reference</a:t>
+            </a:r>
+          </a:p>
+        </p:txBody>
+      </p:sp>
+      <p:sp>
+        <p:nvSpPr>
+          <p:cNvPr id="14" name="TextBox 13">
+            <a:extLst>
+              <a:ext uri="{FF2B5EF4-FFF2-40B4-BE49-F238E27FC236}">
+                <a16:creationId xmlns:a16="http://schemas.microsoft.com/office/drawing/2014/main" id="{4F47F139-6FD7-9021-48FE-2834DCE1DF4F}"/>
+              </a:ext>
+            </a:extLst>
+          </p:cNvPr>
+          <p:cNvSpPr txBox="1"/>
+          <p:nvPr/>
+        </p:nvSpPr>
+        <p:spPr>
+          <a:xfrm>
+            <a:off x="1644162" y="4204896"/>
+            <a:ext cx="3710353" cy="2031325"/>
+          </a:xfrm>
+          <a:prstGeom prst="rect">
+            <a:avLst/>
+          </a:prstGeom>
+          <a:noFill/>
+        </p:spPr>
+        <p:txBody>
+          <a:bodyPr wrap="square">
+            <a:spAutoFit/>
+          </a:bodyPr>
+          <a:lstStyle/>
+          <a:p>
+            <a:r>
+              <a:rPr lang="en-US" dirty="0"/>
+              <a:t>Raw Wii         Experimental response</a:t>
+            </a:r>
+          </a:p>
+          <a:p>
+            <a:endParaRPr lang="en-US" dirty="0"/>
+          </a:p>
+          <a:p>
+            <a:r>
+              <a:rPr lang="en-US" dirty="0"/>
+              <a:t>87°             0°</a:t>
+            </a:r>
+          </a:p>
+          <a:p>
+            <a:r>
+              <a:rPr lang="en-US" dirty="0"/>
+              <a:t>102°           +15°</a:t>
+            </a:r>
+          </a:p>
+          <a:p>
+            <a:r>
+              <a:rPr lang="en-US" dirty="0"/>
+              <a:t>117°           +30°</a:t>
+            </a:r>
+          </a:p>
+          <a:p>
+            <a:r>
+              <a:rPr lang="en-US" dirty="0"/>
+              <a:t>72°            -15°</a:t>
+            </a:r>
+          </a:p>
+          <a:p>
+            <a:r>
+              <a:rPr lang="en-US" dirty="0"/>
+              <a:t>57°            -30°</a:t>
+            </a:r>
+          </a:p>
+        </p:txBody>
+      </p:sp>
+    </p:spTree>
+    <p:extLst>
+      <p:ext uri="{BB962C8B-B14F-4D97-AF65-F5344CB8AC3E}">
+        <p14:creationId xmlns:p14="http://schemas.microsoft.com/office/powerpoint/2010/main" val="976085897"/>
+      </p:ext>
+    </p:extLst>
+  </p:cSld>
+  <p:clrMapOvr>
+    <a:masterClrMapping/>
+  </p:clrMapOvr>
+</p:sld>
+</file>
+
+<file path=ppt/slides/slide23.xml><?xml version="1.0" encoding="utf-8"?>
+<p:sld xmlns:a="http://schemas.openxmlformats.org/drawingml/2006/main" xmlns:r="http://schemas.openxmlformats.org/officeDocument/2006/relationships" xmlns:p="http://schemas.openxmlformats.org/presentationml/2006/main">
+  <p:cSld>
+    <p:spTree>
+      <p:nvGrpSpPr>
+        <p:cNvPr id="1" name="">
+          <a:extLst>
+            <a:ext uri="{FF2B5EF4-FFF2-40B4-BE49-F238E27FC236}">
+              <a16:creationId xmlns:a16="http://schemas.microsoft.com/office/drawing/2014/main" id="{BB9E2237-6053-F100-B305-28783750F366}"/>
+            </a:ext>
+          </a:extLst>
+        </p:cNvPr>
+        <p:cNvGrpSpPr/>
+        <p:nvPr/>
+      </p:nvGrpSpPr>
+      <p:grpSpPr>
+        <a:xfrm>
+          <a:off x="0" y="0"/>
+          <a:ext cx="0" cy="0"/>
+          <a:chOff x="0" y="0"/>
+          <a:chExt cx="0" cy="0"/>
+        </a:xfrm>
+      </p:grpSpPr>
+      <p:sp>
+        <p:nvSpPr>
+          <p:cNvPr id="2" name="Title 1">
+            <a:extLst>
+              <a:ext uri="{FF2B5EF4-FFF2-40B4-BE49-F238E27FC236}">
+                <a16:creationId xmlns:a16="http://schemas.microsoft.com/office/drawing/2014/main" id="{4A2B9F4D-6518-D37B-5C47-ED3E3244DBC9}"/>
+              </a:ext>
+            </a:extLst>
+          </p:cNvPr>
+          <p:cNvSpPr>
+            <a:spLocks noGrp="1"/>
+          </p:cNvSpPr>
+          <p:nvPr>
+            <p:ph type="title"/>
+          </p:nvPr>
+        </p:nvSpPr>
+        <p:spPr>
+          <a:xfrm>
+            <a:off x="0" y="18255"/>
+            <a:ext cx="12192000" cy="587801"/>
+          </a:xfrm>
+        </p:spPr>
+        <p:txBody>
+          <a:bodyPr>
+            <a:normAutofit fontScale="90000"/>
+          </a:bodyPr>
+          <a:lstStyle/>
+          <a:p>
+            <a:r>
+              <a:rPr lang="en-US" dirty="0"/>
+              <a:t>Angle wrapping</a:t>
+            </a:r>
+          </a:p>
+        </p:txBody>
+      </p:sp>
+      <p:sp>
+        <p:nvSpPr>
+          <p:cNvPr id="4" name="TextBox 3">
+            <a:extLst>
+              <a:ext uri="{FF2B5EF4-FFF2-40B4-BE49-F238E27FC236}">
+                <a16:creationId xmlns:a16="http://schemas.microsoft.com/office/drawing/2014/main" id="{E5F78C2C-7825-28B5-6870-3E79E857C7D1}"/>
+              </a:ext>
+            </a:extLst>
+          </p:cNvPr>
+          <p:cNvSpPr txBox="1"/>
+          <p:nvPr/>
+        </p:nvSpPr>
+        <p:spPr>
+          <a:xfrm>
+            <a:off x="527539" y="923165"/>
+            <a:ext cx="6207368" cy="369332"/>
+          </a:xfrm>
+          <a:prstGeom prst="rect">
+            <a:avLst/>
+          </a:prstGeom>
+          <a:noFill/>
+        </p:spPr>
+        <p:txBody>
+          <a:bodyPr wrap="square">
+            <a:spAutoFit/>
+          </a:bodyPr>
+          <a:lstStyle/>
+          <a:p>
+            <a:r>
+              <a:rPr lang="en-US" dirty="0"/>
+              <a:t>handles crossing the </a:t>
             </a:r>
             <a:r>
               <a:rPr lang="en-US" dirty="0">
@@ -7520,63 +8704,97 @@
             </a:r>
             <a:r>
               <a:rPr lang="en-US" dirty="0"/>
-              <a:t>, etc.? </a:t>
-            </a:r>
-          </a:p>
-          <a:p>
-            <a:pPr marL="342900" lvl="0" indent="-342900">
-              <a:buFont typeface="Arial" panose="020B0604020202020204" pitchFamily="34" charset="0"/>
-              <a:buChar char="•"/>
-            </a:pPr>
-            <a:r>
-              <a:rPr lang="en-US" dirty="0"/>
-              <a:t>How many speaker positions / LED positions should the final system represent? </a:t>
-            </a:r>
-          </a:p>
-          <a:p>
-            <a:pPr marL="342900" lvl="0" indent="-342900">
-              <a:buFont typeface="Arial" panose="020B0604020202020204" pitchFamily="34" charset="0"/>
-              <a:buChar char="•"/>
-            </a:pPr>
-            <a:r>
-              <a:rPr lang="en-US" dirty="0"/>
-              <a:t>Should responses be continuous azimuth values or snapped to speaker locations? </a:t>
-            </a:r>
-          </a:p>
-          <a:p>
-            <a:pPr marL="342900" lvl="0" indent="-342900">
-              <a:buFont typeface="Arial" panose="020B0604020202020204" pitchFamily="34" charset="0"/>
-              <a:buChar char="•"/>
-            </a:pPr>
-            <a:r>
-              <a:rPr lang="en-US" dirty="0"/>
-              <a:t>Should </a:t>
-            </a:r>
-            <a:r>
-              <a:rPr lang="en-US" dirty="0" err="1"/>
-              <a:t>LEDResponseCore</a:t>
-            </a:r>
-            <a:r>
-              <a:rPr lang="en-US" dirty="0"/>
-              <a:t> communicate directly with the experiment software, probably through </a:t>
-            </a:r>
-            <a:r>
-              <a:rPr lang="en-US" b="1" dirty="0"/>
-              <a:t>LSL</a:t>
-            </a:r>
-            <a:r>
-              <a:rPr lang="en-US" dirty="0"/>
-              <a:t>, rather than operate as a standalone tool? </a:t>
-            </a:r>
-          </a:p>
-          <a:p>
-            <a:pPr marL="342900" lvl="0" indent="-342900">
-              <a:buFont typeface="Arial" panose="020B0604020202020204" pitchFamily="34" charset="0"/>
-              <a:buChar char="•"/>
-            </a:pPr>
-            <a:r>
-              <a:rPr lang="en-US" dirty="0"/>
-              <a:t>Do we want Wii Remote to remain the target controller given the Bluetooth friction, or is it mainly useful for proving the interaction concept?</a:t>
+              <a:t> boundary</a:t>
+            </a:r>
+          </a:p>
+        </p:txBody>
+      </p:sp>
+      <p:sp>
+        <p:nvSpPr>
+          <p:cNvPr id="6" name="TextBox 5">
+            <a:extLst>
+              <a:ext uri="{FF2B5EF4-FFF2-40B4-BE49-F238E27FC236}">
+                <a16:creationId xmlns:a16="http://schemas.microsoft.com/office/drawing/2014/main" id="{00DE0BAB-A9F4-48E5-E65C-BEC6AB30DB03}"/>
+              </a:ext>
+            </a:extLst>
+          </p:cNvPr>
+          <p:cNvSpPr txBox="1"/>
+          <p:nvPr/>
+        </p:nvSpPr>
+        <p:spPr>
+          <a:xfrm>
+            <a:off x="527539" y="1609606"/>
+            <a:ext cx="6207368" cy="369332"/>
+          </a:xfrm>
+          <a:prstGeom prst="rect">
+            <a:avLst/>
+          </a:prstGeom>
+          <a:noFill/>
+        </p:spPr>
+        <p:txBody>
+          <a:bodyPr wrap="square">
+            <a:spAutoFit/>
+          </a:bodyPr>
+          <a:lstStyle/>
+          <a:p>
+            <a:r>
+              <a:rPr lang="en-US" dirty="0">
+                <a:solidFill>
+                  <a:srgbClr val="FF0000"/>
+                </a:solidFill>
+              </a:rPr>
+              <a:t>relative = (</a:t>
+            </a:r>
+            <a:r>
+              <a:rPr lang="en-US" dirty="0" err="1">
+                <a:solidFill>
+                  <a:srgbClr val="FF0000"/>
+                </a:solidFill>
+              </a:rPr>
+              <a:t>raw_angle</a:t>
+            </a:r>
+            <a:r>
+              <a:rPr lang="en-US" dirty="0">
+                <a:solidFill>
+                  <a:srgbClr val="FF0000"/>
+                </a:solidFill>
+              </a:rPr>
+              <a:t> - zero + 180) % 360 - 180</a:t>
+            </a:r>
+          </a:p>
+        </p:txBody>
+      </p:sp>
+      <p:sp>
+        <p:nvSpPr>
+          <p:cNvPr id="8" name="TextBox 7">
+            <a:extLst>
+              <a:ext uri="{FF2B5EF4-FFF2-40B4-BE49-F238E27FC236}">
+                <a16:creationId xmlns:a16="http://schemas.microsoft.com/office/drawing/2014/main" id="{0EB98530-D2A0-1176-4927-26409578F520}"/>
+              </a:ext>
+            </a:extLst>
+          </p:cNvPr>
+          <p:cNvSpPr txBox="1"/>
+          <p:nvPr/>
+        </p:nvSpPr>
+        <p:spPr>
+          <a:xfrm>
+            <a:off x="527539" y="2296047"/>
+            <a:ext cx="6207368" cy="369332"/>
+          </a:xfrm>
+          <a:prstGeom prst="rect">
+            <a:avLst/>
+          </a:prstGeom>
+          <a:noFill/>
+        </p:spPr>
+        <p:txBody>
+          <a:bodyPr wrap="square">
+            <a:spAutoFit/>
+          </a:bodyPr>
+          <a:lstStyle/>
+          <a:p>
+            <a:r>
+              <a:rPr lang="en-US" dirty="0"/>
+              <a:t>That forces the result into: -180° ... 0° ... +180°</a:t>
             </a:r>
           </a:p>
         </p:txBody>
@@ -7584,7 +8802,1925 @@
     </p:spTree>
     <p:extLst>
       <p:ext uri="{BB962C8B-B14F-4D97-AF65-F5344CB8AC3E}">
-        <p14:creationId xmlns:p14="http://schemas.microsoft.com/office/powerpoint/2010/main" val="2637071818"/>
+        <p14:creationId xmlns:p14="http://schemas.microsoft.com/office/powerpoint/2010/main" val="3739296335"/>
+      </p:ext>
+    </p:extLst>
+  </p:cSld>
+  <p:clrMapOvr>
+    <a:masterClrMapping/>
+  </p:clrMapOvr>
+</p:sld>
+</file>
+
+<file path=ppt/slides/slide24.xml><?xml version="1.0" encoding="utf-8"?>
+<p:sld xmlns:a="http://schemas.openxmlformats.org/drawingml/2006/main" xmlns:r="http://schemas.openxmlformats.org/officeDocument/2006/relationships" xmlns:p="http://schemas.openxmlformats.org/presentationml/2006/main">
+  <p:cSld>
+    <p:spTree>
+      <p:nvGrpSpPr>
+        <p:cNvPr id="1" name="">
+          <a:extLst>
+            <a:ext uri="{FF2B5EF4-FFF2-40B4-BE49-F238E27FC236}">
+              <a16:creationId xmlns:a16="http://schemas.microsoft.com/office/drawing/2014/main" id="{CD4E9FF7-483A-1C56-D6CF-54266FD492F0}"/>
+            </a:ext>
+          </a:extLst>
+        </p:cNvPr>
+        <p:cNvGrpSpPr/>
+        <p:nvPr/>
+      </p:nvGrpSpPr>
+      <p:grpSpPr>
+        <a:xfrm>
+          <a:off x="0" y="0"/>
+          <a:ext cx="0" cy="0"/>
+          <a:chOff x="0" y="0"/>
+          <a:chExt cx="0" cy="0"/>
+        </a:xfrm>
+      </p:grpSpPr>
+      <p:sp>
+        <p:nvSpPr>
+          <p:cNvPr id="2" name="Title 1">
+            <a:extLst>
+              <a:ext uri="{FF2B5EF4-FFF2-40B4-BE49-F238E27FC236}">
+                <a16:creationId xmlns:a16="http://schemas.microsoft.com/office/drawing/2014/main" id="{26DFA02A-3E68-722D-8EAA-029BE41EE18B}"/>
+              </a:ext>
+            </a:extLst>
+          </p:cNvPr>
+          <p:cNvSpPr>
+            <a:spLocks noGrp="1"/>
+          </p:cNvSpPr>
+          <p:nvPr>
+            <p:ph type="title"/>
+          </p:nvPr>
+        </p:nvSpPr>
+        <p:spPr>
+          <a:xfrm>
+            <a:off x="0" y="18255"/>
+            <a:ext cx="12192000" cy="587801"/>
+          </a:xfrm>
+        </p:spPr>
+        <p:txBody>
+          <a:bodyPr>
+            <a:normAutofit fontScale="90000"/>
+          </a:bodyPr>
+          <a:lstStyle/>
+          <a:p>
+            <a:r>
+              <a:rPr lang="en-US" dirty="0"/>
+              <a:t>Pointing Mode (</a:t>
+            </a:r>
+            <a:r>
+              <a:rPr lang="en-US" b="1" dirty="0">
+                <a:solidFill>
+                  <a:srgbClr val="FF0000"/>
+                </a:solidFill>
+              </a:rPr>
+              <a:t>experimental</a:t>
+            </a:r>
+            <a:r>
+              <a:rPr lang="en-US" b="1" dirty="0"/>
+              <a:t>)</a:t>
+            </a:r>
+            <a:endParaRPr lang="en-US" dirty="0"/>
+          </a:p>
+        </p:txBody>
+      </p:sp>
+      <p:sp>
+        <p:nvSpPr>
+          <p:cNvPr id="4" name="TextBox 3">
+            <a:extLst>
+              <a:ext uri="{FF2B5EF4-FFF2-40B4-BE49-F238E27FC236}">
+                <a16:creationId xmlns:a16="http://schemas.microsoft.com/office/drawing/2014/main" id="{902616A1-D8F6-4C70-6242-F8A578C1BC0B}"/>
+              </a:ext>
+            </a:extLst>
+          </p:cNvPr>
+          <p:cNvSpPr txBox="1"/>
+          <p:nvPr/>
+        </p:nvSpPr>
+        <p:spPr>
+          <a:xfrm>
+            <a:off x="659422" y="846212"/>
+            <a:ext cx="7851531" cy="369332"/>
+          </a:xfrm>
+          <a:prstGeom prst="rect">
+            <a:avLst/>
+          </a:prstGeom>
+          <a:noFill/>
+        </p:spPr>
+        <p:txBody>
+          <a:bodyPr wrap="square">
+            <a:spAutoFit/>
+          </a:bodyPr>
+          <a:lstStyle/>
+          <a:p>
+            <a:r>
+              <a:rPr lang="en-US" b="1" dirty="0"/>
+              <a:t>Wii </a:t>
+            </a:r>
+            <a:r>
+              <a:rPr lang="en-US" b="1" dirty="0" err="1"/>
+              <a:t>MotionPlus</a:t>
+            </a:r>
+            <a:r>
+              <a:rPr lang="en-US" b="1" dirty="0"/>
+              <a:t> gyroscope data</a:t>
+            </a:r>
+            <a:r>
+              <a:rPr lang="en-US" dirty="0"/>
+              <a:t>, not gravity-based accelerometer angle</a:t>
+            </a:r>
+          </a:p>
+        </p:txBody>
+      </p:sp>
+      <p:sp>
+        <p:nvSpPr>
+          <p:cNvPr id="7" name="Rectangle 6">
+            <a:extLst>
+              <a:ext uri="{FF2B5EF4-FFF2-40B4-BE49-F238E27FC236}">
+                <a16:creationId xmlns:a16="http://schemas.microsoft.com/office/drawing/2014/main" id="{6183C246-4374-CC67-0DB4-D12F9D62DDDB}"/>
+              </a:ext>
+            </a:extLst>
+          </p:cNvPr>
+          <p:cNvSpPr/>
+          <p:nvPr/>
+        </p:nvSpPr>
+        <p:spPr>
+          <a:xfrm>
+            <a:off x="844063" y="1817837"/>
+            <a:ext cx="1987060" cy="661593"/>
+          </a:xfrm>
+          <a:prstGeom prst="rect">
+            <a:avLst/>
+          </a:prstGeom>
+        </p:spPr>
+        <p:style>
+          <a:lnRef idx="2">
+            <a:schemeClr val="accent1">
+              <a:shade val="15000"/>
+            </a:schemeClr>
+          </a:lnRef>
+          <a:fillRef idx="1">
+            <a:schemeClr val="accent1"/>
+          </a:fillRef>
+          <a:effectRef idx="0">
+            <a:schemeClr val="accent1"/>
+          </a:effectRef>
+          <a:fontRef idx="minor">
+            <a:schemeClr val="lt1"/>
+          </a:fontRef>
+        </p:style>
+        <p:txBody>
+          <a:bodyPr rtlCol="0" anchor="ctr"/>
+          <a:lstStyle/>
+          <a:p>
+            <a:pPr algn="ctr"/>
+            <a:r>
+              <a:rPr lang="en-US" dirty="0"/>
+              <a:t> Wii </a:t>
+            </a:r>
+            <a:r>
+              <a:rPr lang="en-US" dirty="0" err="1"/>
+              <a:t>MotionPlus</a:t>
+            </a:r>
+            <a:endParaRPr lang="en-US" dirty="0"/>
+          </a:p>
+        </p:txBody>
+      </p:sp>
+      <p:cxnSp>
+        <p:nvCxnSpPr>
+          <p:cNvPr id="8" name="Straight Arrow Connector 7">
+            <a:extLst>
+              <a:ext uri="{FF2B5EF4-FFF2-40B4-BE49-F238E27FC236}">
+                <a16:creationId xmlns:a16="http://schemas.microsoft.com/office/drawing/2014/main" id="{C9158D4D-7696-6A53-E72C-E599D632D1D0}"/>
+              </a:ext>
+            </a:extLst>
+          </p:cNvPr>
+          <p:cNvCxnSpPr>
+            <a:cxnSpLocks/>
+            <a:stCxn id="7" idx="3"/>
+            <a:endCxn id="13" idx="1"/>
+          </p:cNvCxnSpPr>
+          <p:nvPr/>
+        </p:nvCxnSpPr>
+        <p:spPr>
+          <a:xfrm flipV="1">
+            <a:off x="2831123" y="2148633"/>
+            <a:ext cx="606671" cy="1"/>
+          </a:xfrm>
+          <a:prstGeom prst="straightConnector1">
+            <a:avLst/>
+          </a:prstGeom>
+          <a:ln>
+            <a:tailEnd type="triangle"/>
+          </a:ln>
+        </p:spPr>
+        <p:style>
+          <a:lnRef idx="2">
+            <a:schemeClr val="accent1"/>
+          </a:lnRef>
+          <a:fillRef idx="0">
+            <a:schemeClr val="accent1"/>
+          </a:fillRef>
+          <a:effectRef idx="1">
+            <a:schemeClr val="accent1"/>
+          </a:effectRef>
+          <a:fontRef idx="minor">
+            <a:schemeClr val="tx1"/>
+          </a:fontRef>
+        </p:style>
+      </p:cxnSp>
+      <p:sp>
+        <p:nvSpPr>
+          <p:cNvPr id="13" name="Rectangle 12">
+            <a:extLst>
+              <a:ext uri="{FF2B5EF4-FFF2-40B4-BE49-F238E27FC236}">
+                <a16:creationId xmlns:a16="http://schemas.microsoft.com/office/drawing/2014/main" id="{AC40C4C0-DD17-C32F-CA3E-A08204B3D779}"/>
+              </a:ext>
+            </a:extLst>
+          </p:cNvPr>
+          <p:cNvSpPr/>
+          <p:nvPr/>
+        </p:nvSpPr>
+        <p:spPr>
+          <a:xfrm>
+            <a:off x="3437794" y="1817836"/>
+            <a:ext cx="1925513" cy="661593"/>
+          </a:xfrm>
+          <a:prstGeom prst="rect">
+            <a:avLst/>
+          </a:prstGeom>
+        </p:spPr>
+        <p:style>
+          <a:lnRef idx="2">
+            <a:schemeClr val="accent1">
+              <a:shade val="15000"/>
+            </a:schemeClr>
+          </a:lnRef>
+          <a:fillRef idx="1">
+            <a:schemeClr val="accent1"/>
+          </a:fillRef>
+          <a:effectRef idx="0">
+            <a:schemeClr val="accent1"/>
+          </a:effectRef>
+          <a:fontRef idx="minor">
+            <a:schemeClr val="lt1"/>
+          </a:fontRef>
+        </p:style>
+        <p:txBody>
+          <a:bodyPr rtlCol="0" anchor="ctr"/>
+          <a:lstStyle/>
+          <a:p>
+            <a:r>
+              <a:rPr lang="en-US" dirty="0"/>
+              <a:t>angular velocity</a:t>
+            </a:r>
+          </a:p>
+        </p:txBody>
+      </p:sp>
+      <p:sp>
+        <p:nvSpPr>
+          <p:cNvPr id="17" name="Rectangle 16">
+            <a:extLst>
+              <a:ext uri="{FF2B5EF4-FFF2-40B4-BE49-F238E27FC236}">
+                <a16:creationId xmlns:a16="http://schemas.microsoft.com/office/drawing/2014/main" id="{B5A78024-8084-7FEF-0E43-331329A513DB}"/>
+              </a:ext>
+            </a:extLst>
+          </p:cNvPr>
+          <p:cNvSpPr/>
+          <p:nvPr/>
+        </p:nvSpPr>
+        <p:spPr>
+          <a:xfrm>
+            <a:off x="5761894" y="1834318"/>
+            <a:ext cx="1987060" cy="661593"/>
+          </a:xfrm>
+          <a:prstGeom prst="rect">
+            <a:avLst/>
+          </a:prstGeom>
+        </p:spPr>
+        <p:style>
+          <a:lnRef idx="2">
+            <a:schemeClr val="accent1">
+              <a:shade val="15000"/>
+            </a:schemeClr>
+          </a:lnRef>
+          <a:fillRef idx="1">
+            <a:schemeClr val="accent1"/>
+          </a:fillRef>
+          <a:effectRef idx="0">
+            <a:schemeClr val="accent1"/>
+          </a:effectRef>
+          <a:fontRef idx="minor">
+            <a:schemeClr val="lt1"/>
+          </a:fontRef>
+        </p:style>
+        <p:txBody>
+          <a:bodyPr rtlCol="0" anchor="ctr"/>
+          <a:lstStyle/>
+          <a:p>
+            <a:r>
+              <a:rPr lang="en-US" dirty="0"/>
+              <a:t>degrees / second</a:t>
+            </a:r>
+          </a:p>
+        </p:txBody>
+      </p:sp>
+      <p:cxnSp>
+        <p:nvCxnSpPr>
+          <p:cNvPr id="18" name="Straight Arrow Connector 17">
+            <a:extLst>
+              <a:ext uri="{FF2B5EF4-FFF2-40B4-BE49-F238E27FC236}">
+                <a16:creationId xmlns:a16="http://schemas.microsoft.com/office/drawing/2014/main" id="{CB70207A-D5E0-DA12-75C1-830DA64BACFE}"/>
+              </a:ext>
+            </a:extLst>
+          </p:cNvPr>
+          <p:cNvCxnSpPr>
+            <a:cxnSpLocks/>
+            <a:stCxn id="17" idx="3"/>
+            <a:endCxn id="24" idx="1"/>
+          </p:cNvCxnSpPr>
+          <p:nvPr/>
+        </p:nvCxnSpPr>
+        <p:spPr>
+          <a:xfrm>
+            <a:off x="7748954" y="2165115"/>
+            <a:ext cx="553917" cy="35623"/>
+          </a:xfrm>
+          <a:prstGeom prst="straightConnector1">
+            <a:avLst/>
+          </a:prstGeom>
+          <a:ln>
+            <a:tailEnd type="triangle"/>
+          </a:ln>
+        </p:spPr>
+        <p:style>
+          <a:lnRef idx="2">
+            <a:schemeClr val="accent1"/>
+          </a:lnRef>
+          <a:fillRef idx="0">
+            <a:schemeClr val="accent1"/>
+          </a:fillRef>
+          <a:effectRef idx="1">
+            <a:schemeClr val="accent1"/>
+          </a:effectRef>
+          <a:fontRef idx="minor">
+            <a:schemeClr val="tx1"/>
+          </a:fontRef>
+        </p:style>
+      </p:cxnSp>
+      <p:sp>
+        <p:nvSpPr>
+          <p:cNvPr id="22" name="Rectangle 21">
+            <a:extLst>
+              <a:ext uri="{FF2B5EF4-FFF2-40B4-BE49-F238E27FC236}">
+                <a16:creationId xmlns:a16="http://schemas.microsoft.com/office/drawing/2014/main" id="{8A5D8E3B-45D0-AFDB-95DF-6A1E09BE319E}"/>
+              </a:ext>
+            </a:extLst>
+          </p:cNvPr>
+          <p:cNvSpPr/>
+          <p:nvPr/>
+        </p:nvSpPr>
+        <p:spPr>
+          <a:xfrm>
+            <a:off x="8355625" y="2963768"/>
+            <a:ext cx="1987060" cy="661593"/>
+          </a:xfrm>
+          <a:prstGeom prst="rect">
+            <a:avLst/>
+          </a:prstGeom>
+        </p:spPr>
+        <p:style>
+          <a:lnRef idx="2">
+            <a:schemeClr val="accent1">
+              <a:shade val="15000"/>
+            </a:schemeClr>
+          </a:lnRef>
+          <a:fillRef idx="1">
+            <a:schemeClr val="accent1"/>
+          </a:fillRef>
+          <a:effectRef idx="0">
+            <a:schemeClr val="accent1"/>
+          </a:effectRef>
+          <a:fontRef idx="minor">
+            <a:schemeClr val="lt1"/>
+          </a:fontRef>
+        </p:style>
+        <p:txBody>
+          <a:bodyPr rtlCol="0" anchor="ctr"/>
+          <a:lstStyle/>
+          <a:p>
+            <a:r>
+              <a:rPr lang="en-US" dirty="0"/>
+              <a:t>relative yaw angle</a:t>
+            </a:r>
+          </a:p>
+        </p:txBody>
+      </p:sp>
+      <p:sp>
+        <p:nvSpPr>
+          <p:cNvPr id="24" name="Rectangle 23">
+            <a:extLst>
+              <a:ext uri="{FF2B5EF4-FFF2-40B4-BE49-F238E27FC236}">
+                <a16:creationId xmlns:a16="http://schemas.microsoft.com/office/drawing/2014/main" id="{7BCFA2A7-BC22-9DFA-507B-692A3C6A781B}"/>
+              </a:ext>
+            </a:extLst>
+          </p:cNvPr>
+          <p:cNvSpPr/>
+          <p:nvPr/>
+        </p:nvSpPr>
+        <p:spPr>
+          <a:xfrm>
+            <a:off x="8302871" y="1869941"/>
+            <a:ext cx="1987060" cy="661593"/>
+          </a:xfrm>
+          <a:prstGeom prst="rect">
+            <a:avLst/>
+          </a:prstGeom>
+        </p:spPr>
+        <p:style>
+          <a:lnRef idx="2">
+            <a:schemeClr val="accent1">
+              <a:shade val="15000"/>
+            </a:schemeClr>
+          </a:lnRef>
+          <a:fillRef idx="1">
+            <a:schemeClr val="accent1"/>
+          </a:fillRef>
+          <a:effectRef idx="0">
+            <a:schemeClr val="accent1"/>
+          </a:effectRef>
+          <a:fontRef idx="minor">
+            <a:schemeClr val="lt1"/>
+          </a:fontRef>
+        </p:style>
+        <p:txBody>
+          <a:bodyPr rtlCol="0" anchor="ctr"/>
+          <a:lstStyle/>
+          <a:p>
+            <a:r>
+              <a:rPr lang="en-US" dirty="0"/>
+              <a:t>integrate over time</a:t>
+            </a:r>
+          </a:p>
+        </p:txBody>
+      </p:sp>
+      <p:cxnSp>
+        <p:nvCxnSpPr>
+          <p:cNvPr id="25" name="Straight Arrow Connector 24">
+            <a:extLst>
+              <a:ext uri="{FF2B5EF4-FFF2-40B4-BE49-F238E27FC236}">
+                <a16:creationId xmlns:a16="http://schemas.microsoft.com/office/drawing/2014/main" id="{87DF6CF5-DDA4-58BE-E30C-5083031E6A7E}"/>
+              </a:ext>
+            </a:extLst>
+          </p:cNvPr>
+          <p:cNvCxnSpPr>
+            <a:cxnSpLocks/>
+            <a:endCxn id="17" idx="1"/>
+          </p:cNvCxnSpPr>
+          <p:nvPr/>
+        </p:nvCxnSpPr>
+        <p:spPr>
+          <a:xfrm>
+            <a:off x="5363307" y="2165115"/>
+            <a:ext cx="398587" cy="0"/>
+          </a:xfrm>
+          <a:prstGeom prst="straightConnector1">
+            <a:avLst/>
+          </a:prstGeom>
+          <a:ln>
+            <a:tailEnd type="triangle"/>
+          </a:ln>
+        </p:spPr>
+        <p:style>
+          <a:lnRef idx="2">
+            <a:schemeClr val="accent1"/>
+          </a:lnRef>
+          <a:fillRef idx="0">
+            <a:schemeClr val="accent1"/>
+          </a:fillRef>
+          <a:effectRef idx="1">
+            <a:schemeClr val="accent1"/>
+          </a:effectRef>
+          <a:fontRef idx="minor">
+            <a:schemeClr val="tx1"/>
+          </a:fontRef>
+        </p:style>
+      </p:cxnSp>
+      <p:cxnSp>
+        <p:nvCxnSpPr>
+          <p:cNvPr id="29" name="Straight Arrow Connector 28">
+            <a:extLst>
+              <a:ext uri="{FF2B5EF4-FFF2-40B4-BE49-F238E27FC236}">
+                <a16:creationId xmlns:a16="http://schemas.microsoft.com/office/drawing/2014/main" id="{65DCDB52-2D95-E9CA-06F5-4902B2E06E26}"/>
+              </a:ext>
+            </a:extLst>
+          </p:cNvPr>
+          <p:cNvCxnSpPr>
+            <a:cxnSpLocks/>
+            <a:stCxn id="24" idx="2"/>
+            <a:endCxn id="22" idx="0"/>
+          </p:cNvCxnSpPr>
+          <p:nvPr/>
+        </p:nvCxnSpPr>
+        <p:spPr>
+          <a:xfrm>
+            <a:off x="9296401" y="2531534"/>
+            <a:ext cx="52754" cy="432234"/>
+          </a:xfrm>
+          <a:prstGeom prst="straightConnector1">
+            <a:avLst/>
+          </a:prstGeom>
+          <a:ln>
+            <a:tailEnd type="triangle"/>
+          </a:ln>
+        </p:spPr>
+        <p:style>
+          <a:lnRef idx="2">
+            <a:schemeClr val="accent1"/>
+          </a:lnRef>
+          <a:fillRef idx="0">
+            <a:schemeClr val="accent1"/>
+          </a:fillRef>
+          <a:effectRef idx="1">
+            <a:schemeClr val="accent1"/>
+          </a:effectRef>
+          <a:fontRef idx="minor">
+            <a:schemeClr val="tx1"/>
+          </a:fontRef>
+        </p:style>
+      </p:cxnSp>
+    </p:spTree>
+    <p:extLst>
+      <p:ext uri="{BB962C8B-B14F-4D97-AF65-F5344CB8AC3E}">
+        <p14:creationId xmlns:p14="http://schemas.microsoft.com/office/powerpoint/2010/main" val="3924217592"/>
+      </p:ext>
+    </p:extLst>
+  </p:cSld>
+  <p:clrMapOvr>
+    <a:masterClrMapping/>
+  </p:clrMapOvr>
+</p:sld>
+</file>
+
+<file path=ppt/slides/slide25.xml><?xml version="1.0" encoding="utf-8"?>
+<p:sld xmlns:a="http://schemas.openxmlformats.org/drawingml/2006/main" xmlns:r="http://schemas.openxmlformats.org/officeDocument/2006/relationships" xmlns:p="http://schemas.openxmlformats.org/presentationml/2006/main">
+  <p:cSld>
+    <p:spTree>
+      <p:nvGrpSpPr>
+        <p:cNvPr id="1" name="">
+          <a:extLst>
+            <a:ext uri="{FF2B5EF4-FFF2-40B4-BE49-F238E27FC236}">
+              <a16:creationId xmlns:a16="http://schemas.microsoft.com/office/drawing/2014/main" id="{592235F2-17D9-F53D-7D02-DCB6636F35D5}"/>
+            </a:ext>
+          </a:extLst>
+        </p:cNvPr>
+        <p:cNvGrpSpPr/>
+        <p:nvPr/>
+      </p:nvGrpSpPr>
+      <p:grpSpPr>
+        <a:xfrm>
+          <a:off x="0" y="0"/>
+          <a:ext cx="0" cy="0"/>
+          <a:chOff x="0" y="0"/>
+          <a:chExt cx="0" cy="0"/>
+        </a:xfrm>
+      </p:grpSpPr>
+      <p:sp>
+        <p:nvSpPr>
+          <p:cNvPr id="2" name="Title 1">
+            <a:extLst>
+              <a:ext uri="{FF2B5EF4-FFF2-40B4-BE49-F238E27FC236}">
+                <a16:creationId xmlns:a16="http://schemas.microsoft.com/office/drawing/2014/main" id="{14AB1C80-BB30-6166-C44C-99C67164F224}"/>
+              </a:ext>
+            </a:extLst>
+          </p:cNvPr>
+          <p:cNvSpPr>
+            <a:spLocks noGrp="1"/>
+          </p:cNvSpPr>
+          <p:nvPr>
+            <p:ph type="title"/>
+          </p:nvPr>
+        </p:nvSpPr>
+        <p:spPr>
+          <a:xfrm>
+            <a:off x="0" y="18255"/>
+            <a:ext cx="12192000" cy="587801"/>
+          </a:xfrm>
+        </p:spPr>
+        <p:txBody>
+          <a:bodyPr>
+            <a:normAutofit fontScale="90000"/>
+          </a:bodyPr>
+          <a:lstStyle/>
+          <a:p>
+            <a:r>
+              <a:rPr lang="en-US" dirty="0"/>
+              <a:t>calibration </a:t>
+            </a:r>
+          </a:p>
+        </p:txBody>
+      </p:sp>
+      <p:sp>
+        <p:nvSpPr>
+          <p:cNvPr id="4" name="TextBox 3">
+            <a:extLst>
+              <a:ext uri="{FF2B5EF4-FFF2-40B4-BE49-F238E27FC236}">
+                <a16:creationId xmlns:a16="http://schemas.microsoft.com/office/drawing/2014/main" id="{125FC9CF-0839-EDF6-78A2-3A816C6E4283}"/>
+              </a:ext>
+            </a:extLst>
+          </p:cNvPr>
+          <p:cNvSpPr txBox="1"/>
+          <p:nvPr/>
+        </p:nvSpPr>
+        <p:spPr>
+          <a:xfrm>
+            <a:off x="738554" y="958334"/>
+            <a:ext cx="6207368" cy="369332"/>
+          </a:xfrm>
+          <a:prstGeom prst="rect">
+            <a:avLst/>
+          </a:prstGeom>
+          <a:noFill/>
+        </p:spPr>
+        <p:txBody>
+          <a:bodyPr wrap="square">
+            <a:spAutoFit/>
+          </a:bodyPr>
+          <a:lstStyle/>
+          <a:p>
+            <a:r>
+              <a:rPr lang="en-US" dirty="0"/>
+              <a:t>- keep the Wii Remote still for about </a:t>
+            </a:r>
+            <a:r>
+              <a:rPr lang="en-US" b="1" dirty="0"/>
+              <a:t>2 seconds</a:t>
+            </a:r>
+            <a:r>
+              <a:rPr lang="en-US" dirty="0"/>
+              <a:t>.</a:t>
+            </a:r>
+          </a:p>
+        </p:txBody>
+      </p:sp>
+      <p:sp>
+        <p:nvSpPr>
+          <p:cNvPr id="6" name="TextBox 5">
+            <a:extLst>
+              <a:ext uri="{FF2B5EF4-FFF2-40B4-BE49-F238E27FC236}">
+                <a16:creationId xmlns:a16="http://schemas.microsoft.com/office/drawing/2014/main" id="{CFF7BF97-E08F-0355-EE1A-6D6B65202DD0}"/>
+              </a:ext>
+            </a:extLst>
+          </p:cNvPr>
+          <p:cNvSpPr txBox="1"/>
+          <p:nvPr/>
+        </p:nvSpPr>
+        <p:spPr>
+          <a:xfrm>
+            <a:off x="738554" y="1495278"/>
+            <a:ext cx="6207368" cy="369332"/>
+          </a:xfrm>
+          <a:prstGeom prst="rect">
+            <a:avLst/>
+          </a:prstGeom>
+          <a:noFill/>
+        </p:spPr>
+        <p:txBody>
+          <a:bodyPr wrap="square">
+            <a:spAutoFit/>
+          </a:bodyPr>
+          <a:lstStyle/>
+          <a:p>
+            <a:r>
+              <a:rPr lang="en-US" dirty="0"/>
+              <a:t>- it collects gyro samples.</a:t>
+            </a:r>
+          </a:p>
+        </p:txBody>
+      </p:sp>
+      <p:sp>
+        <p:nvSpPr>
+          <p:cNvPr id="12" name="Rectangle 11">
+            <a:extLst>
+              <a:ext uri="{FF2B5EF4-FFF2-40B4-BE49-F238E27FC236}">
+                <a16:creationId xmlns:a16="http://schemas.microsoft.com/office/drawing/2014/main" id="{1AF99487-9F7F-AE79-91A7-956630A43DF4}"/>
+              </a:ext>
+            </a:extLst>
+          </p:cNvPr>
+          <p:cNvSpPr/>
+          <p:nvPr/>
+        </p:nvSpPr>
+        <p:spPr>
+          <a:xfrm>
+            <a:off x="738554" y="2445337"/>
+            <a:ext cx="2945421" cy="1035342"/>
+          </a:xfrm>
+          <a:prstGeom prst="rect">
+            <a:avLst/>
+          </a:prstGeom>
+        </p:spPr>
+        <p:style>
+          <a:lnRef idx="2">
+            <a:schemeClr val="accent1">
+              <a:shade val="15000"/>
+            </a:schemeClr>
+          </a:lnRef>
+          <a:fillRef idx="1">
+            <a:schemeClr val="accent1"/>
+          </a:fillRef>
+          <a:effectRef idx="0">
+            <a:schemeClr val="accent1"/>
+          </a:effectRef>
+          <a:fontRef idx="minor">
+            <a:schemeClr val="lt1"/>
+          </a:fontRef>
+        </p:style>
+        <p:txBody>
+          <a:bodyPr rtlCol="0" anchor="ctr"/>
+          <a:lstStyle/>
+          <a:p>
+            <a:r>
+              <a:rPr lang="en-US" dirty="0"/>
+              <a:t>Actual motion = 0°/s</a:t>
+            </a:r>
+          </a:p>
+          <a:p>
+            <a:r>
+              <a:rPr lang="en-US" dirty="0"/>
+              <a:t>Gyro reports = +0.72°/s</a:t>
+            </a:r>
+          </a:p>
+        </p:txBody>
+      </p:sp>
+      <p:sp>
+        <p:nvSpPr>
+          <p:cNvPr id="14" name="Rectangle 13">
+            <a:extLst>
+              <a:ext uri="{FF2B5EF4-FFF2-40B4-BE49-F238E27FC236}">
+                <a16:creationId xmlns:a16="http://schemas.microsoft.com/office/drawing/2014/main" id="{C9A767AE-7198-3371-F907-418520288C2A}"/>
+              </a:ext>
+            </a:extLst>
+          </p:cNvPr>
+          <p:cNvSpPr/>
+          <p:nvPr/>
+        </p:nvSpPr>
+        <p:spPr>
+          <a:xfrm>
+            <a:off x="4360984" y="2445337"/>
+            <a:ext cx="2400301" cy="1035342"/>
+          </a:xfrm>
+          <a:prstGeom prst="rect">
+            <a:avLst/>
+          </a:prstGeom>
+        </p:spPr>
+        <p:style>
+          <a:lnRef idx="2">
+            <a:schemeClr val="accent1">
+              <a:shade val="15000"/>
+            </a:schemeClr>
+          </a:lnRef>
+          <a:fillRef idx="1">
+            <a:schemeClr val="accent1"/>
+          </a:fillRef>
+          <a:effectRef idx="0">
+            <a:schemeClr val="accent1"/>
+          </a:effectRef>
+          <a:fontRef idx="minor">
+            <a:schemeClr val="lt1"/>
+          </a:fontRef>
+        </p:style>
+        <p:txBody>
+          <a:bodyPr rtlCol="0" anchor="ctr"/>
+          <a:lstStyle/>
+          <a:p>
+            <a:r>
+              <a:rPr lang="en-US" dirty="0"/>
+              <a:t>gyro bias ≈ +0.72°/s</a:t>
+            </a:r>
+          </a:p>
+        </p:txBody>
+      </p:sp>
+      <p:cxnSp>
+        <p:nvCxnSpPr>
+          <p:cNvPr id="15" name="Straight Arrow Connector 14">
+            <a:extLst>
+              <a:ext uri="{FF2B5EF4-FFF2-40B4-BE49-F238E27FC236}">
+                <a16:creationId xmlns:a16="http://schemas.microsoft.com/office/drawing/2014/main" id="{AFE62E8F-461B-2005-DF04-CD011ACB805A}"/>
+              </a:ext>
+            </a:extLst>
+          </p:cNvPr>
+          <p:cNvCxnSpPr>
+            <a:cxnSpLocks/>
+            <a:endCxn id="14" idx="1"/>
+          </p:cNvCxnSpPr>
+          <p:nvPr/>
+        </p:nvCxnSpPr>
+        <p:spPr>
+          <a:xfrm flipV="1">
+            <a:off x="3613638" y="2963008"/>
+            <a:ext cx="747346" cy="1"/>
+          </a:xfrm>
+          <a:prstGeom prst="straightConnector1">
+            <a:avLst/>
+          </a:prstGeom>
+          <a:ln>
+            <a:tailEnd type="triangle"/>
+          </a:ln>
+        </p:spPr>
+        <p:style>
+          <a:lnRef idx="2">
+            <a:schemeClr val="accent1"/>
+          </a:lnRef>
+          <a:fillRef idx="0">
+            <a:schemeClr val="accent1"/>
+          </a:fillRef>
+          <a:effectRef idx="1">
+            <a:schemeClr val="accent1"/>
+          </a:effectRef>
+          <a:fontRef idx="minor">
+            <a:schemeClr val="tx1"/>
+          </a:fontRef>
+        </p:style>
+      </p:cxnSp>
+    </p:spTree>
+    <p:extLst>
+      <p:ext uri="{BB962C8B-B14F-4D97-AF65-F5344CB8AC3E}">
+        <p14:creationId xmlns:p14="http://schemas.microsoft.com/office/powerpoint/2010/main" val="1265825141"/>
+      </p:ext>
+    </p:extLst>
+  </p:cSld>
+  <p:clrMapOvr>
+    <a:masterClrMapping/>
+  </p:clrMapOvr>
+</p:sld>
+</file>
+
+<file path=ppt/slides/slide26.xml><?xml version="1.0" encoding="utf-8"?>
+<p:sld xmlns:a="http://schemas.openxmlformats.org/drawingml/2006/main" xmlns:r="http://schemas.openxmlformats.org/officeDocument/2006/relationships" xmlns:p="http://schemas.openxmlformats.org/presentationml/2006/main">
+  <p:cSld>
+    <p:spTree>
+      <p:nvGrpSpPr>
+        <p:cNvPr id="1" name="">
+          <a:extLst>
+            <a:ext uri="{FF2B5EF4-FFF2-40B4-BE49-F238E27FC236}">
+              <a16:creationId xmlns:a16="http://schemas.microsoft.com/office/drawing/2014/main" id="{B51DA69F-F480-BE36-8785-6C2329D620F9}"/>
+            </a:ext>
+          </a:extLst>
+        </p:cNvPr>
+        <p:cNvGrpSpPr/>
+        <p:nvPr/>
+      </p:nvGrpSpPr>
+      <p:grpSpPr>
+        <a:xfrm>
+          <a:off x="0" y="0"/>
+          <a:ext cx="0" cy="0"/>
+          <a:chOff x="0" y="0"/>
+          <a:chExt cx="0" cy="0"/>
+        </a:xfrm>
+      </p:grpSpPr>
+      <p:sp>
+        <p:nvSpPr>
+          <p:cNvPr id="2" name="Title 1">
+            <a:extLst>
+              <a:ext uri="{FF2B5EF4-FFF2-40B4-BE49-F238E27FC236}">
+                <a16:creationId xmlns:a16="http://schemas.microsoft.com/office/drawing/2014/main" id="{AE5E8F3C-BA34-833D-3C94-6E70F7B575D0}"/>
+              </a:ext>
+            </a:extLst>
+          </p:cNvPr>
+          <p:cNvSpPr>
+            <a:spLocks noGrp="1"/>
+          </p:cNvSpPr>
+          <p:nvPr>
+            <p:ph type="title"/>
+          </p:nvPr>
+        </p:nvSpPr>
+        <p:spPr>
+          <a:xfrm>
+            <a:off x="0" y="18255"/>
+            <a:ext cx="12192000" cy="587801"/>
+          </a:xfrm>
+        </p:spPr>
+        <p:txBody>
+          <a:bodyPr>
+            <a:normAutofit fontScale="90000"/>
+          </a:bodyPr>
+          <a:lstStyle/>
+          <a:p>
+            <a:r>
+              <a:rPr lang="en-US" dirty="0"/>
+              <a:t>Gyro Integration</a:t>
+            </a:r>
+          </a:p>
+        </p:txBody>
+      </p:sp>
+      <p:sp>
+        <p:nvSpPr>
+          <p:cNvPr id="4" name="TextBox 3">
+            <a:extLst>
+              <a:ext uri="{FF2B5EF4-FFF2-40B4-BE49-F238E27FC236}">
+                <a16:creationId xmlns:a16="http://schemas.microsoft.com/office/drawing/2014/main" id="{EDC89427-3030-CED4-8836-5A71C4E83314}"/>
+              </a:ext>
+            </a:extLst>
+          </p:cNvPr>
+          <p:cNvSpPr txBox="1"/>
+          <p:nvPr/>
+        </p:nvSpPr>
+        <p:spPr>
+          <a:xfrm>
+            <a:off x="931984" y="835187"/>
+            <a:ext cx="2611316" cy="369332"/>
+          </a:xfrm>
+          <a:prstGeom prst="rect">
+            <a:avLst/>
+          </a:prstGeom>
+          <a:noFill/>
+        </p:spPr>
+        <p:txBody>
+          <a:bodyPr wrap="square">
+            <a:spAutoFit/>
+          </a:bodyPr>
+          <a:lstStyle/>
+          <a:p>
+            <a:r>
+              <a:rPr lang="en-US" dirty="0"/>
+              <a:t>trapezoidal integration.</a:t>
+            </a:r>
+          </a:p>
+        </p:txBody>
+      </p:sp>
+      <p:sp>
+        <p:nvSpPr>
+          <p:cNvPr id="6" name="TextBox 5">
+            <a:extLst>
+              <a:ext uri="{FF2B5EF4-FFF2-40B4-BE49-F238E27FC236}">
+                <a16:creationId xmlns:a16="http://schemas.microsoft.com/office/drawing/2014/main" id="{BDA94D24-29C6-96A0-DB07-298365F0751B}"/>
+              </a:ext>
+            </a:extLst>
+          </p:cNvPr>
+          <p:cNvSpPr txBox="1"/>
+          <p:nvPr/>
+        </p:nvSpPr>
+        <p:spPr>
+          <a:xfrm>
+            <a:off x="931984" y="1972234"/>
+            <a:ext cx="6207368" cy="923330"/>
+          </a:xfrm>
+          <a:prstGeom prst="rect">
+            <a:avLst/>
+          </a:prstGeom>
+          <a:noFill/>
+        </p:spPr>
+        <p:txBody>
+          <a:bodyPr wrap="square">
+            <a:spAutoFit/>
+          </a:bodyPr>
+          <a:lstStyle/>
+          <a:p>
+            <a:r>
+              <a:rPr lang="en-US" dirty="0"/>
+              <a:t>previous rate = 20°/s</a:t>
+            </a:r>
+          </a:p>
+          <a:p>
+            <a:r>
+              <a:rPr lang="en-US" dirty="0"/>
+              <a:t>current rate  = 24°/s</a:t>
+            </a:r>
+          </a:p>
+          <a:p>
+            <a:r>
+              <a:rPr lang="en-US" dirty="0"/>
+              <a:t>time interval = 0.01 s</a:t>
+            </a:r>
+          </a:p>
+        </p:txBody>
+      </p:sp>
+      <p:sp>
+        <p:nvSpPr>
+          <p:cNvPr id="9" name="Rectangle 8">
+            <a:extLst>
+              <a:ext uri="{FF2B5EF4-FFF2-40B4-BE49-F238E27FC236}">
+                <a16:creationId xmlns:a16="http://schemas.microsoft.com/office/drawing/2014/main" id="{FF8ADF97-23A6-AA24-1F73-6082C31E4D06}"/>
+              </a:ext>
+            </a:extLst>
+          </p:cNvPr>
+          <p:cNvSpPr/>
+          <p:nvPr/>
+        </p:nvSpPr>
+        <p:spPr>
+          <a:xfrm>
+            <a:off x="1002323" y="3245437"/>
+            <a:ext cx="2945421" cy="1035342"/>
+          </a:xfrm>
+          <a:prstGeom prst="rect">
+            <a:avLst/>
+          </a:prstGeom>
+        </p:spPr>
+        <p:style>
+          <a:lnRef idx="2">
+            <a:schemeClr val="accent1">
+              <a:shade val="15000"/>
+            </a:schemeClr>
+          </a:lnRef>
+          <a:fillRef idx="1">
+            <a:schemeClr val="accent1"/>
+          </a:fillRef>
+          <a:effectRef idx="0">
+            <a:schemeClr val="accent1"/>
+          </a:effectRef>
+          <a:fontRef idx="minor">
+            <a:schemeClr val="lt1"/>
+          </a:fontRef>
+        </p:style>
+        <p:txBody>
+          <a:bodyPr rtlCol="0" anchor="ctr"/>
+          <a:lstStyle/>
+          <a:p>
+            <a:r>
+              <a:rPr lang="en-US" dirty="0"/>
+              <a:t>previous rate = 20°/s</a:t>
+            </a:r>
+          </a:p>
+          <a:p>
+            <a:r>
+              <a:rPr lang="en-US" dirty="0"/>
+              <a:t>current rate  = 24°/s</a:t>
+            </a:r>
+          </a:p>
+          <a:p>
+            <a:r>
+              <a:rPr lang="en-US" dirty="0"/>
+              <a:t>time interval = 0.01 s</a:t>
+            </a:r>
+          </a:p>
+        </p:txBody>
+      </p:sp>
+      <p:cxnSp>
+        <p:nvCxnSpPr>
+          <p:cNvPr id="10" name="Straight Arrow Connector 9">
+            <a:extLst>
+              <a:ext uri="{FF2B5EF4-FFF2-40B4-BE49-F238E27FC236}">
+                <a16:creationId xmlns:a16="http://schemas.microsoft.com/office/drawing/2014/main" id="{217141DB-107E-1F08-5DF6-0F175A7182E8}"/>
+              </a:ext>
+            </a:extLst>
+          </p:cNvPr>
+          <p:cNvCxnSpPr>
+            <a:cxnSpLocks/>
+          </p:cNvCxnSpPr>
+          <p:nvPr/>
+        </p:nvCxnSpPr>
+        <p:spPr>
+          <a:xfrm flipV="1">
+            <a:off x="3877407" y="3763108"/>
+            <a:ext cx="747346" cy="1"/>
+          </a:xfrm>
+          <a:prstGeom prst="straightConnector1">
+            <a:avLst/>
+          </a:prstGeom>
+          <a:ln>
+            <a:tailEnd type="triangle"/>
+          </a:ln>
+        </p:spPr>
+        <p:style>
+          <a:lnRef idx="2">
+            <a:schemeClr val="accent1"/>
+          </a:lnRef>
+          <a:fillRef idx="0">
+            <a:schemeClr val="accent1"/>
+          </a:fillRef>
+          <a:effectRef idx="1">
+            <a:schemeClr val="accent1"/>
+          </a:effectRef>
+          <a:fontRef idx="minor">
+            <a:schemeClr val="tx1"/>
+          </a:fontRef>
+        </p:style>
+      </p:cxnSp>
+      <p:sp>
+        <p:nvSpPr>
+          <p:cNvPr id="11" name="Rectangle 10">
+            <a:extLst>
+              <a:ext uri="{FF2B5EF4-FFF2-40B4-BE49-F238E27FC236}">
+                <a16:creationId xmlns:a16="http://schemas.microsoft.com/office/drawing/2014/main" id="{EF48D1BD-8452-C706-1623-217029FF6375}"/>
+              </a:ext>
+            </a:extLst>
+          </p:cNvPr>
+          <p:cNvSpPr/>
+          <p:nvPr/>
+        </p:nvSpPr>
+        <p:spPr>
+          <a:xfrm>
+            <a:off x="4624753" y="3245437"/>
+            <a:ext cx="4352193" cy="1035342"/>
+          </a:xfrm>
+          <a:prstGeom prst="rect">
+            <a:avLst/>
+          </a:prstGeom>
+        </p:spPr>
+        <p:style>
+          <a:lnRef idx="2">
+            <a:schemeClr val="accent1">
+              <a:shade val="15000"/>
+            </a:schemeClr>
+          </a:lnRef>
+          <a:fillRef idx="1">
+            <a:schemeClr val="accent1"/>
+          </a:fillRef>
+          <a:effectRef idx="0">
+            <a:schemeClr val="accent1"/>
+          </a:effectRef>
+          <a:fontRef idx="minor">
+            <a:schemeClr val="lt1"/>
+          </a:fontRef>
+        </p:style>
+        <p:txBody>
+          <a:bodyPr rtlCol="0" anchor="ctr"/>
+          <a:lstStyle/>
+          <a:p>
+            <a:r>
+              <a:rPr lang="en-US" dirty="0"/>
+              <a:t>Average rate: (20 + 24) / 2 = 22°/s</a:t>
+            </a:r>
+            <a:br>
+              <a:rPr lang="en-US" dirty="0"/>
+            </a:br>
+            <a:r>
+              <a:rPr lang="en-US" dirty="0"/>
+              <a:t>Angular movement: 22 × 0.01 = 0.22°</a:t>
+            </a:r>
+          </a:p>
+        </p:txBody>
+      </p:sp>
+      <p:sp>
+        <p:nvSpPr>
+          <p:cNvPr id="14" name="TextBox 13">
+            <a:extLst>
+              <a:ext uri="{FF2B5EF4-FFF2-40B4-BE49-F238E27FC236}">
+                <a16:creationId xmlns:a16="http://schemas.microsoft.com/office/drawing/2014/main" id="{FFE0CC4F-509E-5641-CD34-7EEF788794C8}"/>
+              </a:ext>
+            </a:extLst>
+          </p:cNvPr>
+          <p:cNvSpPr txBox="1"/>
+          <p:nvPr/>
+        </p:nvSpPr>
+        <p:spPr>
+          <a:xfrm>
+            <a:off x="426426" y="1602902"/>
+            <a:ext cx="1151794" cy="369332"/>
+          </a:xfrm>
+          <a:prstGeom prst="rect">
+            <a:avLst/>
+          </a:prstGeom>
+          <a:noFill/>
+        </p:spPr>
+        <p:txBody>
+          <a:bodyPr wrap="square">
+            <a:spAutoFit/>
+          </a:bodyPr>
+          <a:lstStyle/>
+          <a:p>
+            <a:r>
+              <a:rPr lang="en-US" sz="1800" dirty="0"/>
+              <a:t>Example</a:t>
+            </a:r>
+            <a:endParaRPr lang="en-US" dirty="0"/>
+          </a:p>
+        </p:txBody>
+      </p:sp>
+      <p:sp>
+        <p:nvSpPr>
+          <p:cNvPr id="16" name="TextBox 15">
+            <a:extLst>
+              <a:ext uri="{FF2B5EF4-FFF2-40B4-BE49-F238E27FC236}">
+                <a16:creationId xmlns:a16="http://schemas.microsoft.com/office/drawing/2014/main" id="{FD5B03EF-FD48-483D-E993-5FB1321F5F16}"/>
+              </a:ext>
+            </a:extLst>
+          </p:cNvPr>
+          <p:cNvSpPr txBox="1"/>
+          <p:nvPr/>
+        </p:nvSpPr>
+        <p:spPr>
+          <a:xfrm>
+            <a:off x="945171" y="4630652"/>
+            <a:ext cx="3486151" cy="1754326"/>
+          </a:xfrm>
+          <a:prstGeom prst="rect">
+            <a:avLst/>
+          </a:prstGeom>
+          <a:noFill/>
+        </p:spPr>
+        <p:txBody>
+          <a:bodyPr wrap="square">
+            <a:spAutoFit/>
+          </a:bodyPr>
+          <a:lstStyle/>
+          <a:p>
+            <a:r>
+              <a:rPr lang="en-US" dirty="0"/>
+              <a:t>tiny movements continuously</a:t>
+            </a:r>
+          </a:p>
+          <a:p>
+            <a:r>
+              <a:rPr lang="en-US" dirty="0"/>
+              <a:t>0°</a:t>
+            </a:r>
+          </a:p>
+          <a:p>
+            <a:r>
+              <a:rPr lang="en-US" dirty="0"/>
+              <a:t>0.22°</a:t>
+            </a:r>
+          </a:p>
+          <a:p>
+            <a:r>
+              <a:rPr lang="en-US" dirty="0"/>
+              <a:t>0.47°</a:t>
+            </a:r>
+          </a:p>
+          <a:p>
+            <a:r>
+              <a:rPr lang="en-US" dirty="0"/>
+              <a:t>0.68°</a:t>
+            </a:r>
+          </a:p>
+          <a:p>
+            <a:r>
+              <a:rPr lang="en-US" dirty="0"/>
+              <a:t>...</a:t>
+            </a:r>
+          </a:p>
+        </p:txBody>
+      </p:sp>
+      <p:sp>
+        <p:nvSpPr>
+          <p:cNvPr id="18" name="TextBox 17">
+            <a:extLst>
+              <a:ext uri="{FF2B5EF4-FFF2-40B4-BE49-F238E27FC236}">
+                <a16:creationId xmlns:a16="http://schemas.microsoft.com/office/drawing/2014/main" id="{8B423BB9-81CD-A7D0-435C-DBF0F9877B0C}"/>
+              </a:ext>
+            </a:extLst>
+          </p:cNvPr>
+          <p:cNvSpPr txBox="1"/>
+          <p:nvPr/>
+        </p:nvSpPr>
+        <p:spPr>
+          <a:xfrm>
+            <a:off x="5213839" y="5138483"/>
+            <a:ext cx="6207368" cy="369332"/>
+          </a:xfrm>
+          <a:prstGeom prst="rect">
+            <a:avLst/>
+          </a:prstGeom>
+          <a:noFill/>
+        </p:spPr>
+        <p:txBody>
+          <a:bodyPr wrap="square">
+            <a:spAutoFit/>
+          </a:bodyPr>
+          <a:lstStyle/>
+          <a:p>
+            <a:r>
+              <a:rPr lang="en-US" dirty="0"/>
+              <a:t>estimated response azimuth</a:t>
+            </a:r>
+          </a:p>
+        </p:txBody>
+      </p:sp>
+      <p:cxnSp>
+        <p:nvCxnSpPr>
+          <p:cNvPr id="19" name="Straight Arrow Connector 18">
+            <a:extLst>
+              <a:ext uri="{FF2B5EF4-FFF2-40B4-BE49-F238E27FC236}">
+                <a16:creationId xmlns:a16="http://schemas.microsoft.com/office/drawing/2014/main" id="{4A4A0868-835F-043D-45FE-4CEABFFCEF39}"/>
+              </a:ext>
+            </a:extLst>
+          </p:cNvPr>
+          <p:cNvCxnSpPr>
+            <a:cxnSpLocks/>
+          </p:cNvCxnSpPr>
+          <p:nvPr/>
+        </p:nvCxnSpPr>
+        <p:spPr>
+          <a:xfrm flipV="1">
+            <a:off x="4246683" y="5323149"/>
+            <a:ext cx="747346" cy="1"/>
+          </a:xfrm>
+          <a:prstGeom prst="straightConnector1">
+            <a:avLst/>
+          </a:prstGeom>
+          <a:ln>
+            <a:tailEnd type="triangle"/>
+          </a:ln>
+        </p:spPr>
+        <p:style>
+          <a:lnRef idx="2">
+            <a:schemeClr val="accent1"/>
+          </a:lnRef>
+          <a:fillRef idx="0">
+            <a:schemeClr val="accent1"/>
+          </a:fillRef>
+          <a:effectRef idx="1">
+            <a:schemeClr val="accent1"/>
+          </a:effectRef>
+          <a:fontRef idx="minor">
+            <a:schemeClr val="tx1"/>
+          </a:fontRef>
+        </p:style>
+      </p:cxnSp>
+    </p:spTree>
+    <p:extLst>
+      <p:ext uri="{BB962C8B-B14F-4D97-AF65-F5344CB8AC3E}">
+        <p14:creationId xmlns:p14="http://schemas.microsoft.com/office/powerpoint/2010/main" val="2875235316"/>
+      </p:ext>
+    </p:extLst>
+  </p:cSld>
+  <p:clrMapOvr>
+    <a:masterClrMapping/>
+  </p:clrMapOvr>
+</p:sld>
+</file>
+
+<file path=ppt/slides/slide27.xml><?xml version="1.0" encoding="utf-8"?>
+<p:sld xmlns:a="http://schemas.openxmlformats.org/drawingml/2006/main" xmlns:r="http://schemas.openxmlformats.org/officeDocument/2006/relationships" xmlns:p="http://schemas.openxmlformats.org/presentationml/2006/main">
+  <p:cSld>
+    <p:spTree>
+      <p:nvGrpSpPr>
+        <p:cNvPr id="1" name="">
+          <a:extLst>
+            <a:ext uri="{FF2B5EF4-FFF2-40B4-BE49-F238E27FC236}">
+              <a16:creationId xmlns:a16="http://schemas.microsoft.com/office/drawing/2014/main" id="{60B7FED6-6BEE-E4A5-376B-72301AE7C12A}"/>
+            </a:ext>
+          </a:extLst>
+        </p:cNvPr>
+        <p:cNvGrpSpPr/>
+        <p:nvPr/>
+      </p:nvGrpSpPr>
+      <p:grpSpPr>
+        <a:xfrm>
+          <a:off x="0" y="0"/>
+          <a:ext cx="0" cy="0"/>
+          <a:chOff x="0" y="0"/>
+          <a:chExt cx="0" cy="0"/>
+        </a:xfrm>
+      </p:grpSpPr>
+      <p:sp>
+        <p:nvSpPr>
+          <p:cNvPr id="2" name="Title 1">
+            <a:extLst>
+              <a:ext uri="{FF2B5EF4-FFF2-40B4-BE49-F238E27FC236}">
+                <a16:creationId xmlns:a16="http://schemas.microsoft.com/office/drawing/2014/main" id="{10367F9A-DAAB-56D6-08B3-579C99EFBDEA}"/>
+              </a:ext>
+            </a:extLst>
+          </p:cNvPr>
+          <p:cNvSpPr>
+            <a:spLocks noGrp="1"/>
+          </p:cNvSpPr>
+          <p:nvPr>
+            <p:ph type="title"/>
+          </p:nvPr>
+        </p:nvSpPr>
+        <p:spPr>
+          <a:xfrm>
+            <a:off x="0" y="18255"/>
+            <a:ext cx="12192000" cy="587801"/>
+          </a:xfrm>
+        </p:spPr>
+        <p:txBody>
+          <a:bodyPr>
+            <a:normAutofit fontScale="90000"/>
+          </a:bodyPr>
+          <a:lstStyle/>
+          <a:p>
+            <a:r>
+              <a:rPr lang="en-US" dirty="0"/>
+              <a:t>Wheel vs. Pointing mode</a:t>
+            </a:r>
+          </a:p>
+        </p:txBody>
+      </p:sp>
+      <p:sp>
+        <p:nvSpPr>
+          <p:cNvPr id="4" name="TextBox 3">
+            <a:extLst>
+              <a:ext uri="{FF2B5EF4-FFF2-40B4-BE49-F238E27FC236}">
+                <a16:creationId xmlns:a16="http://schemas.microsoft.com/office/drawing/2014/main" id="{2E59CCE2-5479-0B4D-634A-7ECC8EB3F611}"/>
+              </a:ext>
+            </a:extLst>
+          </p:cNvPr>
+          <p:cNvSpPr txBox="1"/>
+          <p:nvPr/>
+        </p:nvSpPr>
+        <p:spPr>
+          <a:xfrm>
+            <a:off x="905608" y="1613319"/>
+            <a:ext cx="6207368" cy="923330"/>
+          </a:xfrm>
+          <a:prstGeom prst="rect">
+            <a:avLst/>
+          </a:prstGeom>
+          <a:noFill/>
+        </p:spPr>
+        <p:txBody>
+          <a:bodyPr wrap="square">
+            <a:spAutoFit/>
+          </a:bodyPr>
+          <a:lstStyle/>
+          <a:p>
+            <a:r>
+              <a:rPr lang="en-US" dirty="0"/>
+              <a:t>Wheel mode</a:t>
+            </a:r>
+          </a:p>
+          <a:p>
+            <a:r>
+              <a:rPr lang="en-US" dirty="0"/>
+              <a:t>Accelerometer → absolute gravity reference</a:t>
+            </a:r>
+          </a:p>
+          <a:p>
+            <a:r>
+              <a:rPr lang="en-US" dirty="0"/>
+              <a:t>              	             → doesn't continuously accumulate drift</a:t>
+            </a:r>
+          </a:p>
+        </p:txBody>
+      </p:sp>
+      <p:sp>
+        <p:nvSpPr>
+          <p:cNvPr id="6" name="TextBox 5">
+            <a:extLst>
+              <a:ext uri="{FF2B5EF4-FFF2-40B4-BE49-F238E27FC236}">
+                <a16:creationId xmlns:a16="http://schemas.microsoft.com/office/drawing/2014/main" id="{AE0A668F-16F8-13E4-E44C-49BE9C81D693}"/>
+              </a:ext>
+            </a:extLst>
+          </p:cNvPr>
+          <p:cNvSpPr txBox="1"/>
+          <p:nvPr/>
+        </p:nvSpPr>
+        <p:spPr>
+          <a:xfrm>
+            <a:off x="905608" y="3398022"/>
+            <a:ext cx="6207368" cy="923330"/>
+          </a:xfrm>
+          <a:prstGeom prst="rect">
+            <a:avLst/>
+          </a:prstGeom>
+          <a:noFill/>
+        </p:spPr>
+        <p:txBody>
+          <a:bodyPr wrap="square">
+            <a:spAutoFit/>
+          </a:bodyPr>
+          <a:lstStyle/>
+          <a:p>
+            <a:r>
+              <a:rPr lang="en-US" dirty="0"/>
+              <a:t>Pointing mode</a:t>
+            </a:r>
+          </a:p>
+          <a:p>
+            <a:r>
+              <a:rPr lang="en-US" dirty="0"/>
+              <a:t>Gyro velocity → integration → relative orientation</a:t>
+            </a:r>
+          </a:p>
+          <a:p>
+            <a:r>
+              <a:rPr lang="en-US" dirty="0"/>
+              <a:t>                             → drift accumulates</a:t>
+            </a:r>
+          </a:p>
+        </p:txBody>
+      </p:sp>
+    </p:spTree>
+    <p:extLst>
+      <p:ext uri="{BB962C8B-B14F-4D97-AF65-F5344CB8AC3E}">
+        <p14:creationId xmlns:p14="http://schemas.microsoft.com/office/powerpoint/2010/main" val="1332827510"/>
+      </p:ext>
+    </p:extLst>
+  </p:cSld>
+  <p:clrMapOvr>
+    <a:masterClrMapping/>
+  </p:clrMapOvr>
+</p:sld>
+</file>
+
+<file path=ppt/slides/slide28.xml><?xml version="1.0" encoding="utf-8"?>
+<p:sld xmlns:a="http://schemas.openxmlformats.org/drawingml/2006/main" xmlns:r="http://schemas.openxmlformats.org/officeDocument/2006/relationships" xmlns:p="http://schemas.openxmlformats.org/presentationml/2006/main">
+  <p:cSld>
+    <p:spTree>
+      <p:nvGrpSpPr>
+        <p:cNvPr id="1" name="">
+          <a:extLst>
+            <a:ext uri="{FF2B5EF4-FFF2-40B4-BE49-F238E27FC236}">
+              <a16:creationId xmlns:a16="http://schemas.microsoft.com/office/drawing/2014/main" id="{5B2D38F3-715B-2229-EFB0-F7108FABE7D7}"/>
+            </a:ext>
+          </a:extLst>
+        </p:cNvPr>
+        <p:cNvGrpSpPr/>
+        <p:nvPr/>
+      </p:nvGrpSpPr>
+      <p:grpSpPr>
+        <a:xfrm>
+          <a:off x="0" y="0"/>
+          <a:ext cx="0" cy="0"/>
+          <a:chOff x="0" y="0"/>
+          <a:chExt cx="0" cy="0"/>
+        </a:xfrm>
+      </p:grpSpPr>
+      <p:sp>
+        <p:nvSpPr>
+          <p:cNvPr id="2" name="Title 1">
+            <a:extLst>
+              <a:ext uri="{FF2B5EF4-FFF2-40B4-BE49-F238E27FC236}">
+                <a16:creationId xmlns:a16="http://schemas.microsoft.com/office/drawing/2014/main" id="{B1D10927-13D6-19A6-9DA0-5F732901BCC5}"/>
+              </a:ext>
+            </a:extLst>
+          </p:cNvPr>
+          <p:cNvSpPr>
+            <a:spLocks noGrp="1"/>
+          </p:cNvSpPr>
+          <p:nvPr>
+            <p:ph type="title"/>
+          </p:nvPr>
+        </p:nvSpPr>
+        <p:spPr>
+          <a:xfrm>
+            <a:off x="0" y="18255"/>
+            <a:ext cx="12192000" cy="587801"/>
+          </a:xfrm>
+        </p:spPr>
+        <p:txBody>
+          <a:bodyPr>
+            <a:normAutofit fontScale="90000"/>
+          </a:bodyPr>
+          <a:lstStyle/>
+          <a:p>
+            <a:r>
+              <a:rPr lang="en-US" dirty="0"/>
+              <a:t>Mapping angles to the LED strip</a:t>
+            </a:r>
+          </a:p>
+        </p:txBody>
+      </p:sp>
+      <p:sp>
+        <p:nvSpPr>
+          <p:cNvPr id="4" name="TextBox 3">
+            <a:extLst>
+              <a:ext uri="{FF2B5EF4-FFF2-40B4-BE49-F238E27FC236}">
+                <a16:creationId xmlns:a16="http://schemas.microsoft.com/office/drawing/2014/main" id="{70AD4673-4389-E3BE-C3D5-C54E564F9B79}"/>
+              </a:ext>
+            </a:extLst>
+          </p:cNvPr>
+          <p:cNvSpPr txBox="1"/>
+          <p:nvPr/>
+        </p:nvSpPr>
+        <p:spPr>
+          <a:xfrm>
+            <a:off x="1485899" y="1487968"/>
+            <a:ext cx="4404947" cy="1754326"/>
+          </a:xfrm>
+          <a:prstGeom prst="rect">
+            <a:avLst/>
+          </a:prstGeom>
+          <a:noFill/>
+        </p:spPr>
+        <p:txBody>
+          <a:bodyPr wrap="square">
+            <a:spAutoFit/>
+          </a:bodyPr>
+          <a:lstStyle/>
+          <a:p>
+            <a:r>
+              <a:rPr lang="en-US" dirty="0"/>
+              <a:t>       -60°                       0°                            +60°</a:t>
+            </a:r>
+          </a:p>
+          <a:p>
+            <a:r>
+              <a:rPr lang="en-US" dirty="0"/>
+              <a:t>          |                            |                                   |</a:t>
+            </a:r>
+          </a:p>
+          <a:p>
+            <a:r>
+              <a:rPr lang="en-US" dirty="0"/>
+              <a:t>        ▼                         ▼                                ▼</a:t>
+            </a:r>
+          </a:p>
+          <a:p>
+            <a:endParaRPr lang="en-US" dirty="0"/>
+          </a:p>
+          <a:p>
+            <a:r>
+              <a:rPr lang="en-US" dirty="0"/>
+              <a:t>LED 0  1  2  3 ... 8  [9]  10 ... 15 16 17 18</a:t>
+            </a:r>
+          </a:p>
+          <a:p>
+            <a:r>
+              <a:rPr lang="en-US" dirty="0"/>
+              <a:t>                               CENTER</a:t>
+            </a:r>
+          </a:p>
+        </p:txBody>
+      </p:sp>
+      <p:sp>
+        <p:nvSpPr>
+          <p:cNvPr id="6" name="TextBox 5">
+            <a:extLst>
+              <a:ext uri="{FF2B5EF4-FFF2-40B4-BE49-F238E27FC236}">
+                <a16:creationId xmlns:a16="http://schemas.microsoft.com/office/drawing/2014/main" id="{FE8399C2-5C16-D09D-0B18-D6CA5F222620}"/>
+              </a:ext>
+            </a:extLst>
+          </p:cNvPr>
+          <p:cNvSpPr txBox="1"/>
+          <p:nvPr/>
+        </p:nvSpPr>
+        <p:spPr>
+          <a:xfrm>
+            <a:off x="6301156" y="2101335"/>
+            <a:ext cx="6207368" cy="369332"/>
+          </a:xfrm>
+          <a:prstGeom prst="rect">
+            <a:avLst/>
+          </a:prstGeom>
+          <a:noFill/>
+        </p:spPr>
+        <p:txBody>
+          <a:bodyPr wrap="square">
+            <a:spAutoFit/>
+          </a:bodyPr>
+          <a:lstStyle/>
+          <a:p>
+            <a:r>
+              <a:rPr lang="en-US" dirty="0"/>
+              <a:t>angles are rounded to the nearest LED.</a:t>
+            </a:r>
+          </a:p>
+        </p:txBody>
+      </p:sp>
+      <p:sp>
+        <p:nvSpPr>
+          <p:cNvPr id="8" name="TextBox 7">
+            <a:extLst>
+              <a:ext uri="{FF2B5EF4-FFF2-40B4-BE49-F238E27FC236}">
+                <a16:creationId xmlns:a16="http://schemas.microsoft.com/office/drawing/2014/main" id="{FBB9BDD5-CD58-91D2-1177-8E9CDA65D996}"/>
+              </a:ext>
+            </a:extLst>
+          </p:cNvPr>
+          <p:cNvSpPr txBox="1"/>
+          <p:nvPr/>
+        </p:nvSpPr>
+        <p:spPr>
+          <a:xfrm>
+            <a:off x="1934308" y="3965946"/>
+            <a:ext cx="6365630" cy="923330"/>
+          </a:xfrm>
+          <a:prstGeom prst="rect">
+            <a:avLst/>
+          </a:prstGeom>
+          <a:noFill/>
+        </p:spPr>
+        <p:txBody>
+          <a:bodyPr wrap="square">
+            <a:spAutoFit/>
+          </a:bodyPr>
+          <a:lstStyle/>
+          <a:p>
+            <a:r>
+              <a:rPr lang="en-US" dirty="0"/>
+              <a:t>-30°  → ≈ LED 4–5</a:t>
+            </a:r>
+          </a:p>
+          <a:p>
+            <a:r>
+              <a:rPr lang="en-US" dirty="0"/>
+              <a:t>  0°    → LED 9</a:t>
+            </a:r>
+          </a:p>
+          <a:p>
+            <a:r>
+              <a:rPr lang="en-US" dirty="0"/>
+              <a:t>+30° → ≈ LED 13–14</a:t>
+            </a:r>
+          </a:p>
+        </p:txBody>
+      </p:sp>
+    </p:spTree>
+    <p:extLst>
+      <p:ext uri="{BB962C8B-B14F-4D97-AF65-F5344CB8AC3E}">
+        <p14:creationId xmlns:p14="http://schemas.microsoft.com/office/powerpoint/2010/main" val="810362618"/>
+      </p:ext>
+    </p:extLst>
+  </p:cSld>
+  <p:clrMapOvr>
+    <a:masterClrMapping/>
+  </p:clrMapOvr>
+</p:sld>
+</file>
+
+<file path=ppt/slides/slide29.xml><?xml version="1.0" encoding="utf-8"?>
+<p:sld xmlns:a="http://schemas.openxmlformats.org/drawingml/2006/main" xmlns:r="http://schemas.openxmlformats.org/officeDocument/2006/relationships" xmlns:p="http://schemas.openxmlformats.org/presentationml/2006/main">
+  <p:cSld>
+    <p:spTree>
+      <p:nvGrpSpPr>
+        <p:cNvPr id="1" name="">
+          <a:extLst>
+            <a:ext uri="{FF2B5EF4-FFF2-40B4-BE49-F238E27FC236}">
+              <a16:creationId xmlns:a16="http://schemas.microsoft.com/office/drawing/2014/main" id="{455FA238-3AA2-C7A3-945D-DB84F9F706B4}"/>
+            </a:ext>
+          </a:extLst>
+        </p:cNvPr>
+        <p:cNvGrpSpPr/>
+        <p:nvPr/>
+      </p:nvGrpSpPr>
+      <p:grpSpPr>
+        <a:xfrm>
+          <a:off x="0" y="0"/>
+          <a:ext cx="0" cy="0"/>
+          <a:chOff x="0" y="0"/>
+          <a:chExt cx="0" cy="0"/>
+        </a:xfrm>
+      </p:grpSpPr>
+      <p:sp>
+        <p:nvSpPr>
+          <p:cNvPr id="2" name="Title 1">
+            <a:extLst>
+              <a:ext uri="{FF2B5EF4-FFF2-40B4-BE49-F238E27FC236}">
+                <a16:creationId xmlns:a16="http://schemas.microsoft.com/office/drawing/2014/main" id="{A34197B8-DCB5-1308-FBD7-770988898AC7}"/>
+              </a:ext>
+            </a:extLst>
+          </p:cNvPr>
+          <p:cNvSpPr>
+            <a:spLocks noGrp="1"/>
+          </p:cNvSpPr>
+          <p:nvPr>
+            <p:ph type="title"/>
+          </p:nvPr>
+        </p:nvSpPr>
+        <p:spPr>
+          <a:xfrm>
+            <a:off x="0" y="18255"/>
+            <a:ext cx="12192000" cy="587801"/>
+          </a:xfrm>
+        </p:spPr>
+        <p:txBody>
+          <a:bodyPr>
+            <a:normAutofit fontScale="90000"/>
+          </a:bodyPr>
+          <a:lstStyle/>
+          <a:p>
+            <a:r>
+              <a:rPr lang="en-US" dirty="0"/>
+              <a:t>Issues so far?</a:t>
+            </a:r>
+          </a:p>
+        </p:txBody>
+      </p:sp>
+      <p:sp>
+        <p:nvSpPr>
+          <p:cNvPr id="4" name="TextBox 3">
+            <a:extLst>
+              <a:ext uri="{FF2B5EF4-FFF2-40B4-BE49-F238E27FC236}">
+                <a16:creationId xmlns:a16="http://schemas.microsoft.com/office/drawing/2014/main" id="{D867D916-7E19-B6DB-0F6B-9FB24D1955B3}"/>
+              </a:ext>
+            </a:extLst>
+          </p:cNvPr>
+          <p:cNvSpPr txBox="1"/>
+          <p:nvPr/>
+        </p:nvSpPr>
+        <p:spPr>
+          <a:xfrm>
+            <a:off x="553916" y="1055049"/>
+            <a:ext cx="6207368" cy="369332"/>
+          </a:xfrm>
+          <a:prstGeom prst="rect">
+            <a:avLst/>
+          </a:prstGeom>
+          <a:noFill/>
+        </p:spPr>
+        <p:txBody>
+          <a:bodyPr wrap="square">
+            <a:spAutoFit/>
+          </a:bodyPr>
+          <a:lstStyle/>
+          <a:p>
+            <a:r>
+              <a:rPr lang="en-US" dirty="0"/>
+              <a:t>What happens when the participant turns too far?</a:t>
+            </a:r>
+          </a:p>
+        </p:txBody>
+      </p:sp>
+      <p:sp>
+        <p:nvSpPr>
+          <p:cNvPr id="6" name="TextBox 5">
+            <a:extLst>
+              <a:ext uri="{FF2B5EF4-FFF2-40B4-BE49-F238E27FC236}">
+                <a16:creationId xmlns:a16="http://schemas.microsoft.com/office/drawing/2014/main" id="{EBD637EC-2079-9A82-3B38-68F016DBB9CF}"/>
+              </a:ext>
+            </a:extLst>
+          </p:cNvPr>
+          <p:cNvSpPr txBox="1"/>
+          <p:nvPr/>
+        </p:nvSpPr>
+        <p:spPr>
+          <a:xfrm>
+            <a:off x="553916" y="1688708"/>
+            <a:ext cx="1907930" cy="369332"/>
+          </a:xfrm>
+          <a:prstGeom prst="rect">
+            <a:avLst/>
+          </a:prstGeom>
+          <a:noFill/>
+        </p:spPr>
+        <p:txBody>
+          <a:bodyPr wrap="square">
+            <a:spAutoFit/>
+          </a:bodyPr>
+          <a:lstStyle/>
+          <a:p>
+            <a:r>
+              <a:rPr lang="en-US" dirty="0"/>
+              <a:t>wear something?</a:t>
+            </a:r>
+          </a:p>
+        </p:txBody>
+      </p:sp>
+      <p:sp>
+        <p:nvSpPr>
+          <p:cNvPr id="8" name="TextBox 7">
+            <a:extLst>
+              <a:ext uri="{FF2B5EF4-FFF2-40B4-BE49-F238E27FC236}">
+                <a16:creationId xmlns:a16="http://schemas.microsoft.com/office/drawing/2014/main" id="{E43F7447-B3D2-0987-F2C5-1CFC641A26E3}"/>
+              </a:ext>
+            </a:extLst>
+          </p:cNvPr>
+          <p:cNvSpPr txBox="1"/>
+          <p:nvPr/>
+        </p:nvSpPr>
+        <p:spPr>
+          <a:xfrm>
+            <a:off x="553916" y="2322367"/>
+            <a:ext cx="6207368" cy="369332"/>
+          </a:xfrm>
+          <a:prstGeom prst="rect">
+            <a:avLst/>
+          </a:prstGeom>
+          <a:noFill/>
+        </p:spPr>
+        <p:txBody>
+          <a:bodyPr wrap="square">
+            <a:spAutoFit/>
+          </a:bodyPr>
+          <a:lstStyle/>
+          <a:p>
+            <a:r>
+              <a:rPr lang="en-US" dirty="0"/>
+              <a:t>How often does calibration need?</a:t>
+            </a:r>
+          </a:p>
+        </p:txBody>
+      </p:sp>
+      <p:sp>
+        <p:nvSpPr>
+          <p:cNvPr id="10" name="TextBox 9">
+            <a:extLst>
+              <a:ext uri="{FF2B5EF4-FFF2-40B4-BE49-F238E27FC236}">
+                <a16:creationId xmlns:a16="http://schemas.microsoft.com/office/drawing/2014/main" id="{AF2C1955-B2BD-45B6-0326-ADE6E238D64A}"/>
+              </a:ext>
+            </a:extLst>
+          </p:cNvPr>
+          <p:cNvSpPr txBox="1"/>
+          <p:nvPr/>
+        </p:nvSpPr>
+        <p:spPr>
+          <a:xfrm>
+            <a:off x="553916" y="3059668"/>
+            <a:ext cx="6207368" cy="369332"/>
+          </a:xfrm>
+          <a:prstGeom prst="rect">
+            <a:avLst/>
+          </a:prstGeom>
+          <a:noFill/>
+        </p:spPr>
+        <p:txBody>
+          <a:bodyPr wrap="square">
+            <a:spAutoFit/>
+          </a:bodyPr>
+          <a:lstStyle/>
+          <a:p>
+            <a:r>
+              <a:rPr lang="en-US" dirty="0"/>
+              <a:t>What if Bluetooth disconnects during a study?</a:t>
+            </a:r>
+          </a:p>
+        </p:txBody>
+      </p:sp>
+    </p:spTree>
+    <p:extLst>
+      <p:ext uri="{BB962C8B-B14F-4D97-AF65-F5344CB8AC3E}">
+        <p14:creationId xmlns:p14="http://schemas.microsoft.com/office/powerpoint/2010/main" val="3158951626"/>
       </p:ext>
     </p:extLst>
   </p:cSld>
@@ -7827,6 +10963,203 @@
     <p:extLst>
       <p:ext uri="{BB962C8B-B14F-4D97-AF65-F5344CB8AC3E}">
         <p14:creationId xmlns:p14="http://schemas.microsoft.com/office/powerpoint/2010/main" val="3774935618"/>
+      </p:ext>
+    </p:extLst>
+  </p:cSld>
+  <p:clrMapOvr>
+    <a:masterClrMapping/>
+  </p:clrMapOvr>
+</p:sld>
+</file>
+
+<file path=ppt/slides/slide30.xml><?xml version="1.0" encoding="utf-8"?>
+<p:sld xmlns:a="http://schemas.openxmlformats.org/drawingml/2006/main" xmlns:r="http://schemas.openxmlformats.org/officeDocument/2006/relationships" xmlns:p="http://schemas.openxmlformats.org/presentationml/2006/main">
+  <p:cSld>
+    <p:spTree>
+      <p:nvGrpSpPr>
+        <p:cNvPr id="1" name="">
+          <a:extLst>
+            <a:ext uri="{FF2B5EF4-FFF2-40B4-BE49-F238E27FC236}">
+              <a16:creationId xmlns:a16="http://schemas.microsoft.com/office/drawing/2014/main" id="{8A369CCE-407C-D7D4-9913-FF1C02F1A0F2}"/>
+            </a:ext>
+          </a:extLst>
+        </p:cNvPr>
+        <p:cNvGrpSpPr/>
+        <p:nvPr/>
+      </p:nvGrpSpPr>
+      <p:grpSpPr>
+        <a:xfrm>
+          <a:off x="0" y="0"/>
+          <a:ext cx="0" cy="0"/>
+          <a:chOff x="0" y="0"/>
+          <a:chExt cx="0" cy="0"/>
+        </a:xfrm>
+      </p:grpSpPr>
+      <p:sp>
+        <p:nvSpPr>
+          <p:cNvPr id="2" name="Title 1">
+            <a:extLst>
+              <a:ext uri="{FF2B5EF4-FFF2-40B4-BE49-F238E27FC236}">
+                <a16:creationId xmlns:a16="http://schemas.microsoft.com/office/drawing/2014/main" id="{B412284C-78E4-C6BE-495A-F1E2057C9DCF}"/>
+              </a:ext>
+            </a:extLst>
+          </p:cNvPr>
+          <p:cNvSpPr>
+            <a:spLocks noGrp="1"/>
+          </p:cNvSpPr>
+          <p:nvPr>
+            <p:ph type="title"/>
+          </p:nvPr>
+        </p:nvSpPr>
+        <p:spPr>
+          <a:xfrm>
+            <a:off x="0" y="18255"/>
+            <a:ext cx="12192000" cy="587801"/>
+          </a:xfrm>
+        </p:spPr>
+        <p:txBody>
+          <a:bodyPr>
+            <a:normAutofit fontScale="90000"/>
+          </a:bodyPr>
+          <a:lstStyle/>
+          <a:p>
+            <a:r>
+              <a:rPr lang="en-US" dirty="0"/>
+              <a:t>discussion</a:t>
+            </a:r>
+          </a:p>
+        </p:txBody>
+      </p:sp>
+      <p:sp>
+        <p:nvSpPr>
+          <p:cNvPr id="4" name="TextBox 3">
+            <a:extLst>
+              <a:ext uri="{FF2B5EF4-FFF2-40B4-BE49-F238E27FC236}">
+                <a16:creationId xmlns:a16="http://schemas.microsoft.com/office/drawing/2014/main" id="{B4D3F00A-0E50-BE8D-B0E9-163C2EC2B058}"/>
+              </a:ext>
+            </a:extLst>
+          </p:cNvPr>
+          <p:cNvSpPr txBox="1"/>
+          <p:nvPr/>
+        </p:nvSpPr>
+        <p:spPr>
+          <a:xfrm>
+            <a:off x="553915" y="1055049"/>
+            <a:ext cx="10612315" cy="2862322"/>
+          </a:xfrm>
+          <a:prstGeom prst="rect">
+            <a:avLst/>
+          </a:prstGeom>
+          <a:noFill/>
+        </p:spPr>
+        <p:txBody>
+          <a:bodyPr wrap="square">
+            <a:spAutoFit/>
+          </a:bodyPr>
+          <a:lstStyle/>
+          <a:p>
+            <a:pPr marL="285750" indent="-285750">
+              <a:buFontTx/>
+              <a:buChar char="-"/>
+            </a:pPr>
+            <a:r>
+              <a:rPr lang="en-US" dirty="0"/>
+              <a:t>What to measure? Head orientation, hand pointing, wheel position?</a:t>
+            </a:r>
+          </a:p>
+          <a:p>
+            <a:pPr marL="285750" indent="-285750">
+              <a:buFontTx/>
+              <a:buChar char="-"/>
+            </a:pPr>
+            <a:r>
+              <a:rPr lang="en-US" dirty="0"/>
+              <a:t>angular range?</a:t>
+            </a:r>
+          </a:p>
+          <a:p>
+            <a:pPr marL="285750" indent="-285750">
+              <a:buFontTx/>
+              <a:buChar char="-"/>
+            </a:pPr>
+            <a:r>
+              <a:rPr lang="en-US" dirty="0"/>
+              <a:t>response be continuous or discrete? Like the angle 35.3 or speaker position?</a:t>
+            </a:r>
+          </a:p>
+          <a:p>
+            <a:pPr marL="285750" indent="-285750">
+              <a:buFontTx/>
+              <a:buChar char="-"/>
+            </a:pPr>
+            <a:r>
+              <a:rPr lang="en-US" dirty="0"/>
+              <a:t>Allowed to ear anything? earing a tag, headband, headphones?</a:t>
+            </a:r>
+          </a:p>
+          <a:p>
+            <a:pPr marL="285750" indent="-285750">
+              <a:buFontTx/>
+              <a:buChar char="-"/>
+            </a:pPr>
+            <a:r>
+              <a:rPr lang="en-US" dirty="0"/>
+              <a:t>head pitch and roll matter, or do we only care about yaw/azimuth?</a:t>
+            </a:r>
+          </a:p>
+          <a:p>
+            <a:pPr marL="285750" indent="-285750">
+              <a:buFontTx/>
+              <a:buChar char="-"/>
+            </a:pPr>
+            <a:endParaRPr lang="en-US" dirty="0"/>
+          </a:p>
+          <a:p>
+            <a:pPr marL="285750" indent="-285750">
+              <a:buFontTx/>
+              <a:buChar char="-"/>
+            </a:pPr>
+            <a:r>
+              <a:rPr lang="en-US" dirty="0"/>
+              <a:t>LED is for? Participant feedback, experimenter feedback, speaker positions?</a:t>
+            </a:r>
+          </a:p>
+          <a:p>
+            <a:pPr marL="285750" indent="-285750">
+              <a:buFontTx/>
+              <a:buChar char="-"/>
+            </a:pPr>
+            <a:r>
+              <a:rPr lang="en-US" dirty="0"/>
+              <a:t>Cross-platform, right now python only.</a:t>
+            </a:r>
+          </a:p>
+          <a:p>
+            <a:pPr marL="285750" indent="-285750">
+              <a:buFontTx/>
+              <a:buChar char="-"/>
+            </a:pPr>
+            <a:r>
+              <a:rPr lang="en-US" dirty="0"/>
+              <a:t>send data. what data? via LSL?</a:t>
+            </a:r>
+          </a:p>
+          <a:p>
+            <a:pPr marL="285750" indent="-285750">
+              <a:buFontTx/>
+              <a:buChar char="-"/>
+            </a:pPr>
+            <a:r>
+              <a:rPr lang="en-US" dirty="0"/>
+              <a:t>Next phase?</a:t>
+            </a:r>
+          </a:p>
+        </p:txBody>
+      </p:sp>
+    </p:spTree>
+    <p:extLst>
+      <p:ext uri="{BB962C8B-B14F-4D97-AF65-F5344CB8AC3E}">
+        <p14:creationId xmlns:p14="http://schemas.microsoft.com/office/powerpoint/2010/main" val="3552544426"/>
       </p:ext>
     </p:extLst>
   </p:cSld>
